--- a/assets/ppt/Claude Code 中的 SubAgent.pptx
+++ b/assets/ppt/Claude Code 中的 SubAgent.pptx
@@ -163,6 +163,1356 @@
 <p:cmAuthorLst xmlns:a="http://schemas.openxmlformats.org/drawingml/2006/main" xmlns:r="http://schemas.openxmlformats.org/officeDocument/2006/relationships" xmlns:p="http://schemas.openxmlformats.org/presentationml/2006/main">
   <p:cmAuthor id="1" name="enson" initials="e" lastIdx="2" clrIdx="0"/>
 </p:cmAuthorLst>
+</file>
+
+<file path=ppt/ink/ink1.xml><?xml version="1.0" encoding="utf-8"?>
+<inkml:ink xmlns:inkml="http://www.w3.org/2003/InkML">
+  <inkml:definitions>
+    <inkml:context xml:id="ctx0">
+      <inkml:inkSource xml:id="inkSrc0">
+        <inkml:traceFormat>
+          <inkml:channel name="X" type="integer" units="cm"/>
+          <inkml:channel name="Y" type="integer" units="cm"/>
+        </inkml:traceFormat>
+        <inkml:channelProperties>
+          <inkml:channelProperty channel="X" name="resolution" value="28.3464566929134" units="1/cm"/>
+          <inkml:channelProperty channel="Y" name="resolution" value="28.3464566929134" units="1/cm"/>
+        </inkml:channelProperties>
+      </inkml:inkSource>
+      <inkml:timestamp xml:id="ts0" timeString="2026-03-27T17:05:03"/>
+    </inkml:context>
+    <inkml:brush xml:id="br0">
+      <inkml:brushProperty name="width" value="0.09701" units="cm"/>
+      <inkml:brushProperty name="height" value="0.09701" units="cm"/>
+      <inkml:brushProperty name="color" value="#c00000"/>
+      <inkml:brushProperty name="ignorePressure" value="0"/>
+    </inkml:brush>
+  </inkml:definitions>
+  <inkml:trace contextRef="#ctx0" brushRef="#br0">175 830,'19'-1,"37"1,19 0,-11 0,5 0,-5 3,-22 3,-8 1,4 2,0 2,-10-1,-7 0,-6-2,-7-2,-2-1,-2 0,-1 0,-2 2,0 1,0-1,0 4,2 4,1 4,-1 0,1 2,-2-5,-1-1,-4 1,-4 2,-6 3,-5 1,-4-2,-7-3,-1-3,1-4,-2-1,1-2,-1-1,0-3,-1-1,-2-2,5-2,3-4,0-1,5-1,3 0,4 0,0-1,4 3,-3-4,-4-2,4 3,1-1,0-1,1 0,0-1,-2-3,-1-5,2-1,4 4,2 3,2 3,2 0,2-2,1-3,1 3,1 2,0 3,0 5,0 0,1 2,2-2,-1-1,-1 0,2-1,-1 0,1 0,0 0,0 0,-2 2,1 2</inkml:trace>
+</inkml:ink>
+</file>
+
+<file path=ppt/ink/ink10.xml><?xml version="1.0" encoding="utf-8"?>
+<inkml:ink xmlns:inkml="http://www.w3.org/2003/InkML">
+  <inkml:definitions>
+    <inkml:context xml:id="ctx0">
+      <inkml:inkSource xml:id="inkSrc0">
+        <inkml:traceFormat>
+          <inkml:channel name="X" type="integer" units="cm"/>
+          <inkml:channel name="Y" type="integer" units="cm"/>
+        </inkml:traceFormat>
+        <inkml:channelProperties>
+          <inkml:channelProperty channel="X" name="resolution" value="28.3464566929134" units="1/cm"/>
+          <inkml:channelProperty channel="Y" name="resolution" value="28.3464566929134" units="1/cm"/>
+        </inkml:channelProperties>
+      </inkml:inkSource>
+      <inkml:timestamp xml:id="ts0" timeString="2026-03-27T17:05:03"/>
+    </inkml:context>
+    <inkml:brush xml:id="br0">
+      <inkml:brushProperty name="width" value="0.09701" units="cm"/>
+      <inkml:brushProperty name="height" value="0.09701" units="cm"/>
+      <inkml:brushProperty name="color" value="#c00000"/>
+      <inkml:brushProperty name="ignorePressure" value="0"/>
+    </inkml:brush>
+  </inkml:definitions>
+  <inkml:trace contextRef="#ctx0" brushRef="#br0">804 1103,'-4'20,"0"-5,0-2,2-2,0-5,1-2,1-1,-4 3,2-3,0 0,0 0,0 0,-1 3,0 1,0-1,0 0,2-3,3-6,2 0,0-1,0 1,-1 1,1 0,-1 0,1 0,2-1,2-2,-1 2,-3 1,-1 1,0 4,-4 0,1 0,-2 1,1 0,1-1,-1 0</inkml:trace>
+</inkml:ink>
+</file>
+
+<file path=ppt/ink/ink11.xml><?xml version="1.0" encoding="utf-8"?>
+<inkml:ink xmlns:inkml="http://www.w3.org/2003/InkML">
+  <inkml:definitions>
+    <inkml:context xml:id="ctx0">
+      <inkml:inkSource xml:id="inkSrc0">
+        <inkml:traceFormat>
+          <inkml:channel name="X" type="integer" units="cm"/>
+          <inkml:channel name="Y" type="integer" units="cm"/>
+        </inkml:traceFormat>
+        <inkml:channelProperties>
+          <inkml:channelProperty channel="X" name="resolution" value="28.3464566929134" units="1/cm"/>
+          <inkml:channelProperty channel="Y" name="resolution" value="28.3464566929134" units="1/cm"/>
+        </inkml:channelProperties>
+      </inkml:inkSource>
+      <inkml:timestamp xml:id="ts0" timeString="2026-03-27T17:05:03"/>
+    </inkml:context>
+    <inkml:brush xml:id="br0">
+      <inkml:brushProperty name="width" value="0.09701" units="cm"/>
+      <inkml:brushProperty name="height" value="0.09701" units="cm"/>
+      <inkml:brushProperty name="color" value="#c00000"/>
+      <inkml:brushProperty name="ignorePressure" value="0"/>
+    </inkml:brush>
+  </inkml:definitions>
+  <inkml:trace contextRef="#ctx0" brushRef="#br0">860 1193,'-4'0,"-1"0,0 0,1 0,1 0,2 3,1 2,0 2,1-1,1-1,1-3,0-2,0-2,0-1,1 0,-1-2,0 1,1 1,-3 7,-1 0,1 2,1-3,0 0</inkml:trace>
+</inkml:ink>
+</file>
+
+<file path=ppt/ink/ink12.xml><?xml version="1.0" encoding="utf-8"?>
+<inkml:ink xmlns:inkml="http://www.w3.org/2003/InkML">
+  <inkml:definitions>
+    <inkml:context xml:id="ctx0">
+      <inkml:inkSource xml:id="inkSrc0">
+        <inkml:traceFormat>
+          <inkml:channel name="X" type="integer" units="cm"/>
+          <inkml:channel name="Y" type="integer" units="cm"/>
+        </inkml:traceFormat>
+        <inkml:channelProperties>
+          <inkml:channelProperty channel="X" name="resolution" value="28.3464566929134" units="1/cm"/>
+          <inkml:channelProperty channel="Y" name="resolution" value="28.3464566929134" units="1/cm"/>
+        </inkml:channelProperties>
+      </inkml:inkSource>
+      <inkml:timestamp xml:id="ts0" timeString="2026-03-27T17:05:03"/>
+    </inkml:context>
+    <inkml:brush xml:id="br0">
+      <inkml:brushProperty name="width" value="0.09701" units="cm"/>
+      <inkml:brushProperty name="height" value="0.09701" units="cm"/>
+      <inkml:brushProperty name="color" value="#c00000"/>
+      <inkml:brushProperty name="ignorePressure" value="0"/>
+    </inkml:brush>
+  </inkml:definitions>
+  <inkml:trace contextRef="#ctx0" brushRef="#br0">896 1202,'0'6,"0"-2</inkml:trace>
+</inkml:ink>
+</file>
+
+<file path=ppt/ink/ink13.xml><?xml version="1.0" encoding="utf-8"?>
+<inkml:ink xmlns:inkml="http://www.w3.org/2003/InkML">
+  <inkml:definitions>
+    <inkml:context xml:id="ctx0">
+      <inkml:inkSource xml:id="inkSrc0">
+        <inkml:traceFormat>
+          <inkml:channel name="X" type="integer" units="cm"/>
+          <inkml:channel name="Y" type="integer" units="cm"/>
+        </inkml:traceFormat>
+        <inkml:channelProperties>
+          <inkml:channelProperty channel="X" name="resolution" value="28.3464566929134" units="1/cm"/>
+          <inkml:channelProperty channel="Y" name="resolution" value="28.3464566929134" units="1/cm"/>
+        </inkml:channelProperties>
+      </inkml:inkSource>
+      <inkml:timestamp xml:id="ts0" timeString="2026-03-27T17:05:03"/>
+    </inkml:context>
+    <inkml:brush xml:id="br0">
+      <inkml:brushProperty name="width" value="0.09701" units="cm"/>
+      <inkml:brushProperty name="height" value="0.09701" units="cm"/>
+      <inkml:brushProperty name="color" value="#c00000"/>
+      <inkml:brushProperty name="ignorePressure" value="0"/>
+    </inkml:brush>
+  </inkml:definitions>
+  <inkml:trace contextRef="#ctx0" brushRef="#br0">898 1179,'2'0</inkml:trace>
+</inkml:ink>
+</file>
+
+<file path=ppt/ink/ink14.xml><?xml version="1.0" encoding="utf-8"?>
+<inkml:ink xmlns:inkml="http://www.w3.org/2003/InkML">
+  <inkml:definitions>
+    <inkml:context xml:id="ctx0">
+      <inkml:inkSource xml:id="inkSrc0">
+        <inkml:traceFormat>
+          <inkml:channel name="X" type="integer" units="cm"/>
+          <inkml:channel name="Y" type="integer" units="cm"/>
+        </inkml:traceFormat>
+        <inkml:channelProperties>
+          <inkml:channelProperty channel="X" name="resolution" value="28.3464566929134" units="1/cm"/>
+          <inkml:channelProperty channel="Y" name="resolution" value="28.3464566929134" units="1/cm"/>
+        </inkml:channelProperties>
+      </inkml:inkSource>
+      <inkml:timestamp xml:id="ts0" timeString="2026-03-27T17:05:03"/>
+    </inkml:context>
+    <inkml:brush xml:id="br0">
+      <inkml:brushProperty name="width" value="0.09701" units="cm"/>
+      <inkml:brushProperty name="height" value="0.09701" units="cm"/>
+      <inkml:brushProperty name="color" value="#c00000"/>
+      <inkml:brushProperty name="ignorePressure" value="0"/>
+    </inkml:brush>
+  </inkml:definitions>
+  <inkml:trace contextRef="#ctx0" brushRef="#br0">932 1146,'0'9,"0"9,-1 2,0-5,1-5,0-4,0-10,1-1,1 1,3-2,4-5,4-3,-3 3,-2 2,-3 3,-2 4,0 0,0 1</inkml:trace>
+</inkml:ink>
+</file>
+
+<file path=ppt/ink/ink15.xml><?xml version="1.0" encoding="utf-8"?>
+<inkml:ink xmlns:inkml="http://www.w3.org/2003/InkML">
+  <inkml:definitions>
+    <inkml:context xml:id="ctx0">
+      <inkml:inkSource xml:id="inkSrc0">
+        <inkml:traceFormat>
+          <inkml:channel name="X" type="integer" units="cm"/>
+          <inkml:channel name="Y" type="integer" units="cm"/>
+        </inkml:traceFormat>
+        <inkml:channelProperties>
+          <inkml:channelProperty channel="X" name="resolution" value="28.3464566929134" units="1/cm"/>
+          <inkml:channelProperty channel="Y" name="resolution" value="28.3464566929134" units="1/cm"/>
+        </inkml:channelProperties>
+      </inkml:inkSource>
+      <inkml:timestamp xml:id="ts0" timeString="2026-03-27T17:05:03"/>
+    </inkml:context>
+    <inkml:brush xml:id="br0">
+      <inkml:brushProperty name="width" value="0.09701" units="cm"/>
+      <inkml:brushProperty name="height" value="0.09701" units="cm"/>
+      <inkml:brushProperty name="color" value="#c00000"/>
+      <inkml:brushProperty name="ignorePressure" value="0"/>
+    </inkml:brush>
+  </inkml:definitions>
+  <inkml:trace contextRef="#ctx0" brushRef="#br0">957 1174,'4'2,"3"4,0 1,-2-2,-2-1</inkml:trace>
+</inkml:ink>
+</file>
+
+<file path=ppt/ink/ink16.xml><?xml version="1.0" encoding="utf-8"?>
+<inkml:ink xmlns:inkml="http://www.w3.org/2003/InkML">
+  <inkml:definitions>
+    <inkml:context xml:id="ctx0">
+      <inkml:inkSource xml:id="inkSrc0">
+        <inkml:traceFormat>
+          <inkml:channel name="X" type="integer" units="cm"/>
+          <inkml:channel name="Y" type="integer" units="cm"/>
+        </inkml:traceFormat>
+        <inkml:channelProperties>
+          <inkml:channelProperty channel="X" name="resolution" value="28.3464566929134" units="1/cm"/>
+          <inkml:channelProperty channel="Y" name="resolution" value="28.3464566929134" units="1/cm"/>
+        </inkml:channelProperties>
+      </inkml:inkSource>
+      <inkml:timestamp xml:id="ts0" timeString="2026-03-27T17:05:03"/>
+    </inkml:context>
+    <inkml:brush xml:id="br0">
+      <inkml:brushProperty name="width" value="0.09701" units="cm"/>
+      <inkml:brushProperty name="height" value="0.09701" units="cm"/>
+      <inkml:brushProperty name="color" value="#c00000"/>
+      <inkml:brushProperty name="ignorePressure" value="0"/>
+    </inkml:brush>
+  </inkml:definitions>
+  <inkml:trace contextRef="#ctx0" brushRef="#br0">1007 1168,'0'4,"0"5,0-1,0-1,0-2,0-2,2-7,2-1,2-4,3-3,-2 2,-3 2,-1 1,-2 3,0 1,-1 8,-2 2,1 6,1 0,0-3,0-2,2-4,2-3,3 0,3-1,4 0</inkml:trace>
+</inkml:ink>
+</file>
+
+<file path=ppt/ink/ink17.xml><?xml version="1.0" encoding="utf-8"?>
+<inkml:ink xmlns:inkml="http://www.w3.org/2003/InkML">
+  <inkml:definitions>
+    <inkml:context xml:id="ctx0">
+      <inkml:inkSource xml:id="inkSrc0">
+        <inkml:traceFormat>
+          <inkml:channel name="X" type="integer" units="cm"/>
+          <inkml:channel name="Y" type="integer" units="cm"/>
+        </inkml:traceFormat>
+        <inkml:channelProperties>
+          <inkml:channelProperty channel="X" name="resolution" value="28.3464566929134" units="1/cm"/>
+          <inkml:channelProperty channel="Y" name="resolution" value="28.3464566929134" units="1/cm"/>
+        </inkml:channelProperties>
+      </inkml:inkSource>
+      <inkml:timestamp xml:id="ts0" timeString="2026-03-27T17:05:03"/>
+    </inkml:context>
+    <inkml:brush xml:id="br0">
+      <inkml:brushProperty name="width" value="0.09701" units="cm"/>
+      <inkml:brushProperty name="height" value="0.09701" units="cm"/>
+      <inkml:brushProperty name="color" value="#c00000"/>
+      <inkml:brushProperty name="ignorePressure" value="0"/>
+    </inkml:brush>
+  </inkml:definitions>
+  <inkml:trace contextRef="#ctx0" brushRef="#br0">145 1468,'9'0,"39"1,62 4,59 3,-10-5,-55-3,-21 0,-7 0,-1 0,-10 3,-9 7,-4 1,-17-3,-5-6,10-2,1-4,-1-3,1-1,-1 2,-1 1,-4 0,-3 1,0-1,-2 3,-6 1,-8 1,-4 0,-5 0,-3-2,0 0,-2-1,1 0</inkml:trace>
+</inkml:ink>
+</file>
+
+<file path=ppt/ink/ink18.xml><?xml version="1.0" encoding="utf-8"?>
+<inkml:ink xmlns:inkml="http://www.w3.org/2003/InkML">
+  <inkml:definitions>
+    <inkml:context xml:id="ctx0">
+      <inkml:inkSource xml:id="inkSrc0">
+        <inkml:traceFormat>
+          <inkml:channel name="X" type="integer" units="cm"/>
+          <inkml:channel name="Y" type="integer" units="cm"/>
+        </inkml:traceFormat>
+        <inkml:channelProperties>
+          <inkml:channelProperty channel="X" name="resolution" value="28.3464566929134" units="1/cm"/>
+          <inkml:channelProperty channel="Y" name="resolution" value="28.3464566929134" units="1/cm"/>
+        </inkml:channelProperties>
+      </inkml:inkSource>
+      <inkml:timestamp xml:id="ts0" timeString="2026-03-27T17:05:03"/>
+    </inkml:context>
+    <inkml:brush xml:id="br0">
+      <inkml:brushProperty name="width" value="0.09701" units="cm"/>
+      <inkml:brushProperty name="height" value="0.09701" units="cm"/>
+      <inkml:brushProperty name="color" value="#c00000"/>
+      <inkml:brushProperty name="ignorePressure" value="0"/>
+    </inkml:brush>
+  </inkml:definitions>
+  <inkml:trace contextRef="#ctx0" brushRef="#br0">105 1749,'6'-1,"3"1,5 0,2 0,0 0,-3 0,-2 0,-2-1,0 1,0-1,-2 0,-2 1,-1-1,0 0,3 0,-1 0,0 0,-1 1,-1 0,-1 0,1-1,3-2,9 2</inkml:trace>
+</inkml:ink>
+</file>
+
+<file path=ppt/ink/ink19.xml><?xml version="1.0" encoding="utf-8"?>
+<inkml:ink xmlns:inkml="http://www.w3.org/2003/InkML">
+  <inkml:definitions>
+    <inkml:context xml:id="ctx0">
+      <inkml:inkSource xml:id="inkSrc0">
+        <inkml:traceFormat>
+          <inkml:channel name="X" type="integer" units="cm"/>
+          <inkml:channel name="Y" type="integer" units="cm"/>
+        </inkml:traceFormat>
+        <inkml:channelProperties>
+          <inkml:channelProperty channel="X" name="resolution" value="28.3464566929134" units="1/cm"/>
+          <inkml:channelProperty channel="Y" name="resolution" value="28.3464566929134" units="1/cm"/>
+        </inkml:channelProperties>
+      </inkml:inkSource>
+      <inkml:timestamp xml:id="ts0" timeString="2026-03-27T17:05:03"/>
+    </inkml:context>
+    <inkml:brush xml:id="br0">
+      <inkml:brushProperty name="width" value="0.09701" units="cm"/>
+      <inkml:brushProperty name="height" value="0.09701" units="cm"/>
+      <inkml:brushProperty name="color" value="#c00000"/>
+      <inkml:brushProperty name="ignorePressure" value="0"/>
+    </inkml:brush>
+  </inkml:definitions>
+  <inkml:trace contextRef="#ctx0" brushRef="#br0">293 752,'6'0,"18"0,34 0,28 0,4 0,-17 0,-3 0,-1 0,-7 0,-9 0,-12 0,-15 0,-13 0,-4 0,-5 0,0 0,1 0,0 0,3 1,1-1,0 1,3 0,2 0,4 0,-1 1,-5-1,-3 0,-5 0</inkml:trace>
+</inkml:ink>
+</file>
+
+<file path=ppt/ink/ink2.xml><?xml version="1.0" encoding="utf-8"?>
+<inkml:ink xmlns:inkml="http://www.w3.org/2003/InkML">
+  <inkml:definitions>
+    <inkml:context xml:id="ctx0">
+      <inkml:inkSource xml:id="inkSrc0">
+        <inkml:traceFormat>
+          <inkml:channel name="X" type="integer" units="cm"/>
+          <inkml:channel name="Y" type="integer" units="cm"/>
+        </inkml:traceFormat>
+        <inkml:channelProperties>
+          <inkml:channelProperty channel="X" name="resolution" value="28.3464566929134" units="1/cm"/>
+          <inkml:channelProperty channel="Y" name="resolution" value="28.3464566929134" units="1/cm"/>
+        </inkml:channelProperties>
+      </inkml:inkSource>
+      <inkml:timestamp xml:id="ts0" timeString="2026-03-27T17:05:03"/>
+    </inkml:context>
+    <inkml:brush xml:id="br0">
+      <inkml:brushProperty name="width" value="0.09701" units="cm"/>
+      <inkml:brushProperty name="height" value="0.09701" units="cm"/>
+      <inkml:brushProperty name="color" value="#c00000"/>
+      <inkml:brushProperty name="ignorePressure" value="0"/>
+    </inkml:brush>
+  </inkml:definitions>
+  <inkml:trace contextRef="#ctx0" brushRef="#br0">252 1294,'6'0,"39"0,66 0,23 0,-9 2,-31 6,-44 0,-18-1,-8 2,-8 0,-1 3,-1 2,-5-3,-1-3,-3-1,-2-4,-2 2,-1-1,-1 4,-4 3,-1-2,-3 0,-6-1,-11 0,-4-3,1-3,-5-2,-2 0,2 0,-5 0,-4 0,4 0,8 0,11-1,7-1,2 0,2-1,3 1,2 0,1 0</inkml:trace>
+</inkml:ink>
+</file>
+
+<file path=ppt/ink/ink20.xml><?xml version="1.0" encoding="utf-8"?>
+<inkml:ink xmlns:inkml="http://www.w3.org/2003/InkML">
+  <inkml:definitions>
+    <inkml:context xml:id="ctx0">
+      <inkml:inkSource xml:id="inkSrc0">
+        <inkml:traceFormat>
+          <inkml:channel name="X" type="integer" units="cm"/>
+          <inkml:channel name="Y" type="integer" units="cm"/>
+        </inkml:traceFormat>
+        <inkml:channelProperties>
+          <inkml:channelProperty channel="X" name="resolution" value="28.3464566929134" units="1/cm"/>
+          <inkml:channelProperty channel="Y" name="resolution" value="28.3464566929134" units="1/cm"/>
+        </inkml:channelProperties>
+      </inkml:inkSource>
+      <inkml:timestamp xml:id="ts0" timeString="2026-03-27T17:05:03"/>
+    </inkml:context>
+    <inkml:brush xml:id="br0">
+      <inkml:brushProperty name="width" value="0.09701" units="cm"/>
+      <inkml:brushProperty name="height" value="0.09701" units="cm"/>
+      <inkml:brushProperty name="color" value="#c00000"/>
+      <inkml:brushProperty name="ignorePressure" value="0"/>
+    </inkml:brush>
+  </inkml:definitions>
+  <inkml:trace contextRef="#ctx0" brushRef="#br0">363 1073,'18'-1,"21"1,15 0,-1 0,-13 0,-8 0,-1 0,-10 0,-8 0,-6 1</inkml:trace>
+</inkml:ink>
+</file>
+
+<file path=ppt/ink/ink21.xml><?xml version="1.0" encoding="utf-8"?>
+<inkml:ink xmlns:inkml="http://www.w3.org/2003/InkML">
+  <inkml:definitions>
+    <inkml:context xml:id="ctx0">
+      <inkml:inkSource xml:id="inkSrc0">
+        <inkml:traceFormat>
+          <inkml:channel name="X" type="integer" units="cm"/>
+          <inkml:channel name="Y" type="integer" units="cm"/>
+        </inkml:traceFormat>
+        <inkml:channelProperties>
+          <inkml:channelProperty channel="X" name="resolution" value="28.3464566929134" units="1/cm"/>
+          <inkml:channelProperty channel="Y" name="resolution" value="28.3464566929134" units="1/cm"/>
+        </inkml:channelProperties>
+      </inkml:inkSource>
+      <inkml:timestamp xml:id="ts0" timeString="2026-03-27T17:05:03"/>
+    </inkml:context>
+    <inkml:brush xml:id="br0">
+      <inkml:brushProperty name="width" value="0.09701" units="cm"/>
+      <inkml:brushProperty name="height" value="0.09701" units="cm"/>
+      <inkml:brushProperty name="color" value="#c00000"/>
+      <inkml:brushProperty name="ignorePressure" value="0"/>
+    </inkml:brush>
+  </inkml:definitions>
+  <inkml:trace contextRef="#ctx0" brushRef="#br0">374 1153,'6'0,"16"0,12 0,-2 0,-8 0,-7 0,-9 0,-5 0</inkml:trace>
+</inkml:ink>
+</file>
+
+<file path=ppt/ink/ink22.xml><?xml version="1.0" encoding="utf-8"?>
+<inkml:ink xmlns:inkml="http://www.w3.org/2003/InkML">
+  <inkml:definitions>
+    <inkml:context xml:id="ctx0">
+      <inkml:inkSource xml:id="inkSrc0">
+        <inkml:traceFormat>
+          <inkml:channel name="X" type="integer" units="cm"/>
+          <inkml:channel name="Y" type="integer" units="cm"/>
+        </inkml:traceFormat>
+        <inkml:channelProperties>
+          <inkml:channelProperty channel="X" name="resolution" value="28.3464566929134" units="1/cm"/>
+          <inkml:channelProperty channel="Y" name="resolution" value="28.3464566929134" units="1/cm"/>
+        </inkml:channelProperties>
+      </inkml:inkSource>
+      <inkml:timestamp xml:id="ts0" timeString="2026-03-27T17:05:03"/>
+    </inkml:context>
+    <inkml:brush xml:id="br0">
+      <inkml:brushProperty name="width" value="0.09701" units="cm"/>
+      <inkml:brushProperty name="height" value="0.09701" units="cm"/>
+      <inkml:brushProperty name="color" value="#c00000"/>
+      <inkml:brushProperty name="ignorePressure" value="0"/>
+    </inkml:brush>
+  </inkml:definitions>
+  <inkml:trace contextRef="#ctx0" brushRef="#br0">316 1271,'12'0,"19"0,21 0,-11 1,-23 0</inkml:trace>
+</inkml:ink>
+</file>
+
+<file path=ppt/ink/ink23.xml><?xml version="1.0" encoding="utf-8"?>
+<inkml:ink xmlns:inkml="http://www.w3.org/2003/InkML">
+  <inkml:definitions>
+    <inkml:context xml:id="ctx0">
+      <inkml:inkSource xml:id="inkSrc0">
+        <inkml:traceFormat>
+          <inkml:channel name="X" type="integer" units="cm"/>
+          <inkml:channel name="Y" type="integer" units="cm"/>
+        </inkml:traceFormat>
+        <inkml:channelProperties>
+          <inkml:channelProperty channel="X" name="resolution" value="28.3464566929134" units="1/cm"/>
+          <inkml:channelProperty channel="Y" name="resolution" value="28.3464566929134" units="1/cm"/>
+        </inkml:channelProperties>
+      </inkml:inkSource>
+      <inkml:timestamp xml:id="ts0" timeString="2026-03-27T17:05:03"/>
+    </inkml:context>
+    <inkml:brush xml:id="br0">
+      <inkml:brushProperty name="width" value="0.09701" units="cm"/>
+      <inkml:brushProperty name="height" value="0.09701" units="cm"/>
+      <inkml:brushProperty name="color" value="#c00000"/>
+      <inkml:brushProperty name="ignorePressure" value="0"/>
+    </inkml:brush>
+  </inkml:definitions>
+  <inkml:trace contextRef="#ctx0" brushRef="#br0">134 1996,'7'0,"7"0,9 0,1 0,-4 0,-1 0,-3 0,3 0,0 0,-1 0,4 0,0 0,-2 0,-2 0,1 0,1 0,3 0,0 0,-2-1,-5 1,-2 0,0 0,0 0,4 0,2 0,0 0,-6 0,-4 1,-3 0,-4 0,0-1,1 1,9 3</inkml:trace>
+</inkml:ink>
+</file>
+
+<file path=ppt/ink/ink24.xml><?xml version="1.0" encoding="utf-8"?>
+<inkml:ink xmlns:inkml="http://www.w3.org/2003/InkML">
+  <inkml:definitions>
+    <inkml:context xml:id="ctx0">
+      <inkml:inkSource xml:id="inkSrc0">
+        <inkml:traceFormat>
+          <inkml:channel name="X" type="integer" units="cm"/>
+          <inkml:channel name="Y" type="integer" units="cm"/>
+        </inkml:traceFormat>
+        <inkml:channelProperties>
+          <inkml:channelProperty channel="X" name="resolution" value="28.3464566929134" units="1/cm"/>
+          <inkml:channelProperty channel="Y" name="resolution" value="28.3464566929134" units="1/cm"/>
+        </inkml:channelProperties>
+      </inkml:inkSource>
+      <inkml:timestamp xml:id="ts0" timeString="2026-03-27T17:05:03"/>
+    </inkml:context>
+    <inkml:brush xml:id="br0">
+      <inkml:brushProperty name="width" value="0.09701" units="cm"/>
+      <inkml:brushProperty name="height" value="0.09701" units="cm"/>
+      <inkml:brushProperty name="color" value="#c00000"/>
+      <inkml:brushProperty name="ignorePressure" value="0"/>
+    </inkml:brush>
+  </inkml:definitions>
+  <inkml:trace contextRef="#ctx0" brushRef="#br0">956 1976,'-4'0,"-2"0,-2 0,2 0,0 0,0 0,0 0,2 0,-1 0,2 0,-1 0,0 0,0 0,-2 0,1 0,1 0,0 0,-1 0,1 0,1-1,0 1,-1-1,-1 1,2-1,-1 1,1-1,0 0,-1 0,1 0</inkml:trace>
+</inkml:ink>
+</file>
+
+<file path=ppt/ink/ink25.xml><?xml version="1.0" encoding="utf-8"?>
+<inkml:ink xmlns:inkml="http://www.w3.org/2003/InkML">
+  <inkml:definitions>
+    <inkml:context xml:id="ctx0">
+      <inkml:inkSource xml:id="inkSrc0">
+        <inkml:traceFormat>
+          <inkml:channel name="X" type="integer" units="cm"/>
+          <inkml:channel name="Y" type="integer" units="cm"/>
+        </inkml:traceFormat>
+        <inkml:channelProperties>
+          <inkml:channelProperty channel="X" name="resolution" value="28.3464566929134" units="1/cm"/>
+          <inkml:channelProperty channel="Y" name="resolution" value="28.3464566929134" units="1/cm"/>
+        </inkml:channelProperties>
+      </inkml:inkSource>
+      <inkml:timestamp xml:id="ts0" timeString="2026-03-27T17:05:03"/>
+    </inkml:context>
+    <inkml:brush xml:id="br0">
+      <inkml:brushProperty name="width" value="0.09701" units="cm"/>
+      <inkml:brushProperty name="height" value="0.09701" units="cm"/>
+      <inkml:brushProperty name="color" value="#c00000"/>
+      <inkml:brushProperty name="ignorePressure" value="0"/>
+    </inkml:brush>
+  </inkml:definitions>
+  <inkml:trace contextRef="#ctx0" brushRef="#br0">865 1957,'-3'0,"-1"0,-2 0,-1 0,1 0,0 0,1 0,2 0,6 3,0 0,2 1,1 2,0 1,1-1,-1-1,-2 0,1-2,-2 0,1 1</inkml:trace>
+</inkml:ink>
+</file>
+
+<file path=ppt/ink/ink26.xml><?xml version="1.0" encoding="utf-8"?>
+<inkml:ink xmlns:inkml="http://www.w3.org/2003/InkML">
+  <inkml:definitions>
+    <inkml:context xml:id="ctx0">
+      <inkml:inkSource xml:id="inkSrc0">
+        <inkml:traceFormat>
+          <inkml:channel name="X" type="integer" units="cm"/>
+          <inkml:channel name="Y" type="integer" units="cm"/>
+        </inkml:traceFormat>
+        <inkml:channelProperties>
+          <inkml:channelProperty channel="X" name="resolution" value="28.3464566929134" units="1/cm"/>
+          <inkml:channelProperty channel="Y" name="resolution" value="28.3464566929134" units="1/cm"/>
+        </inkml:channelProperties>
+      </inkml:inkSource>
+      <inkml:timestamp xml:id="ts0" timeString="2026-03-27T17:05:03"/>
+    </inkml:context>
+    <inkml:brush xml:id="br0">
+      <inkml:brushProperty name="width" value="0.09701" units="cm"/>
+      <inkml:brushProperty name="height" value="0.09701" units="cm"/>
+      <inkml:brushProperty name="color" value="#c00000"/>
+      <inkml:brushProperty name="ignorePressure" value="0"/>
+    </inkml:brush>
+  </inkml:definitions>
+  <inkml:trace contextRef="#ctx0" brushRef="#br0">161 2078,'8'0,"11"0,8 0,-3 0,1 0,4 0,-1 0,-2 0,-3 0,-2 0,-1 0,-2 0,2 0,0 0,-2 0,-5 0,-6 0,2 0,2 1,0-1,4 0,2 0,-1 0,-4 0,-4 0,-2 0,-1 0,0 0,0 0,-1 1,0 0,0-1,1 1,1 0,0-1,-1 1,1 0,-1 0,-1 0,0-1,-1 1,0-1,1 0</inkml:trace>
+</inkml:ink>
+</file>
+
+<file path=ppt/ink/ink27.xml><?xml version="1.0" encoding="utf-8"?>
+<inkml:ink xmlns:inkml="http://www.w3.org/2003/InkML">
+  <inkml:definitions>
+    <inkml:context xml:id="ctx0">
+      <inkml:inkSource xml:id="inkSrc0">
+        <inkml:traceFormat>
+          <inkml:channel name="X" type="integer" units="cm"/>
+          <inkml:channel name="Y" type="integer" units="cm"/>
+        </inkml:traceFormat>
+        <inkml:channelProperties>
+          <inkml:channelProperty channel="X" name="resolution" value="28.3464566929134" units="1/cm"/>
+          <inkml:channelProperty channel="Y" name="resolution" value="28.3464566929134" units="1/cm"/>
+        </inkml:channelProperties>
+      </inkml:inkSource>
+      <inkml:timestamp xml:id="ts0" timeString="2026-03-27T17:05:03"/>
+    </inkml:context>
+    <inkml:brush xml:id="br0">
+      <inkml:brushProperty name="width" value="0.09701" units="cm"/>
+      <inkml:brushProperty name="height" value="0.09701" units="cm"/>
+      <inkml:brushProperty name="color" value="#c00000"/>
+      <inkml:brushProperty name="ignorePressure" value="0"/>
+    </inkml:brush>
+  </inkml:definitions>
+  <inkml:trace contextRef="#ctx0" brushRef="#br0">2380 507,'-2'-4,"3"0,3-2,2-1,2 0,2 1,0 0,-1 2,1 1,1 0,4 1,3 1,3 1,4 0,-2 1,1 3,0 4,-3 1,-2 1,-5-3,-6 0,-1-1,-2-1,0 2,-1 1,2 4,0 1,-2-2,0-1,0 0,-1 0,-1 1,0 1,-1 1,-1-4,0-2,0-3,-2 1,-2 0,-5 2,-2 3,0-1,0-2,1-2,1-1,-1 0,-2 1,0 0,1 0,0-1,-3-1,0-1,3-2,4 0,3 0,1 0,-3-1,-3-1,-3-3,0-1,0-2,-2-4,0-6,2-2,1-2,2 1,1 4,3 4,1 1,2 2,1-1,0 1,1 2,-1 1,1 2,0 0,0-2,0 0,0 1,0 1,0 2</inkml:trace>
+</inkml:ink>
+</file>
+
+<file path=ppt/ink/ink28.xml><?xml version="1.0" encoding="utf-8"?>
+<inkml:ink xmlns:inkml="http://www.w3.org/2003/InkML">
+  <inkml:definitions>
+    <inkml:context xml:id="ctx0">
+      <inkml:inkSource xml:id="inkSrc0">
+        <inkml:traceFormat>
+          <inkml:channel name="X" type="integer" units="cm"/>
+          <inkml:channel name="Y" type="integer" units="cm"/>
+        </inkml:traceFormat>
+        <inkml:channelProperties>
+          <inkml:channelProperty channel="X" name="resolution" value="28.3464566929134" units="1/cm"/>
+          <inkml:channelProperty channel="Y" name="resolution" value="28.3464566929134" units="1/cm"/>
+        </inkml:channelProperties>
+      </inkml:inkSource>
+      <inkml:timestamp xml:id="ts0" timeString="2026-03-27T17:05:03"/>
+    </inkml:context>
+    <inkml:brush xml:id="br0">
+      <inkml:brushProperty name="width" value="0.09701" units="cm"/>
+      <inkml:brushProperty name="height" value="0.09701" units="cm"/>
+      <inkml:brushProperty name="color" value="#c00000"/>
+      <inkml:brushProperty name="ignorePressure" value="0"/>
+    </inkml:brush>
+  </inkml:definitions>
+  <inkml:trace contextRef="#ctx0" brushRef="#br0">1980 553,'4'0,"1"0,-1 0,1 0,1 0,-1 0,1 0,-2 0,1 0,0 0,-1 0,1 0,-2 0,0 0,0 0,2 0,-2-1,0 1,0-1,2 0,-2 0,1 0,0 0,-1 0,0 1,0 0,2 0,-1 0,-1 0,1 0,1 0</inkml:trace>
+</inkml:ink>
+</file>
+
+<file path=ppt/ink/ink29.xml><?xml version="1.0" encoding="utf-8"?>
+<inkml:ink xmlns:inkml="http://www.w3.org/2003/InkML">
+  <inkml:definitions>
+    <inkml:context xml:id="ctx0">
+      <inkml:inkSource xml:id="inkSrc0">
+        <inkml:traceFormat>
+          <inkml:channel name="X" type="integer" units="cm"/>
+          <inkml:channel name="Y" type="integer" units="cm"/>
+        </inkml:traceFormat>
+        <inkml:channelProperties>
+          <inkml:channelProperty channel="X" name="resolution" value="28.3464566929134" units="1/cm"/>
+          <inkml:channelProperty channel="Y" name="resolution" value="28.3464566929134" units="1/cm"/>
+        </inkml:channelProperties>
+      </inkml:inkSource>
+      <inkml:timestamp xml:id="ts0" timeString="2026-03-27T17:05:03"/>
+    </inkml:context>
+    <inkml:brush xml:id="br0">
+      <inkml:brushProperty name="width" value="0.09701" units="cm"/>
+      <inkml:brushProperty name="height" value="0.09701" units="cm"/>
+      <inkml:brushProperty name="color" value="#c00000"/>
+      <inkml:brushProperty name="ignorePressure" value="0"/>
+    </inkml:brush>
+  </inkml:definitions>
+  <inkml:trace contextRef="#ctx0" brushRef="#br0">3030 465,'19'0,"38"0,3 0,-35 0,-6 0,-7 0,-8 0</inkml:trace>
+</inkml:ink>
+</file>
+
+<file path=ppt/ink/ink3.xml><?xml version="1.0" encoding="utf-8"?>
+<inkml:ink xmlns:inkml="http://www.w3.org/2003/InkML">
+  <inkml:definitions>
+    <inkml:context xml:id="ctx0">
+      <inkml:inkSource xml:id="inkSrc0">
+        <inkml:traceFormat>
+          <inkml:channel name="X" type="integer" units="cm"/>
+          <inkml:channel name="Y" type="integer" units="cm"/>
+        </inkml:traceFormat>
+        <inkml:channelProperties>
+          <inkml:channelProperty channel="X" name="resolution" value="28.3464566929134" units="1/cm"/>
+          <inkml:channelProperty channel="Y" name="resolution" value="28.3464566929134" units="1/cm"/>
+        </inkml:channelProperties>
+      </inkml:inkSource>
+      <inkml:timestamp xml:id="ts0" timeString="2026-03-27T17:05:03"/>
+    </inkml:context>
+    <inkml:brush xml:id="br0">
+      <inkml:brushProperty name="width" value="0.09701" units="cm"/>
+      <inkml:brushProperty name="height" value="0.09701" units="cm"/>
+      <inkml:brushProperty name="color" value="#c00000"/>
+      <inkml:brushProperty name="ignorePressure" value="0"/>
+    </inkml:brush>
+  </inkml:definitions>
+  <inkml:trace contextRef="#ctx0" brushRef="#br0">354 1323,'-2'7,"2"5,0 8,0 0,0 1,0-1,1-3,7 3,9 1,9 0,0-5,-1-5,6-4,4-5,2-5,2-7,-5-5,-6 0,-4 0,-8 4,-6 3,-4 4,-3 2</inkml:trace>
+</inkml:ink>
+</file>
+
+<file path=ppt/ink/ink30.xml><?xml version="1.0" encoding="utf-8"?>
+<inkml:ink xmlns:inkml="http://www.w3.org/2003/InkML">
+  <inkml:definitions>
+    <inkml:context xml:id="ctx0">
+      <inkml:inkSource xml:id="inkSrc0">
+        <inkml:traceFormat>
+          <inkml:channel name="X" type="integer" units="cm"/>
+          <inkml:channel name="Y" type="integer" units="cm"/>
+        </inkml:traceFormat>
+        <inkml:channelProperties>
+          <inkml:channelProperty channel="X" name="resolution" value="28.3464566929134" units="1/cm"/>
+          <inkml:channelProperty channel="Y" name="resolution" value="28.3464566929134" units="1/cm"/>
+        </inkml:channelProperties>
+      </inkml:inkSource>
+      <inkml:timestamp xml:id="ts0" timeString="2026-03-27T17:05:03"/>
+    </inkml:context>
+    <inkml:brush xml:id="br0">
+      <inkml:brushProperty name="width" value="0.09701" units="cm"/>
+      <inkml:brushProperty name="height" value="0.09701" units="cm"/>
+      <inkml:brushProperty name="color" value="#c00000"/>
+      <inkml:brushProperty name="ignorePressure" value="0"/>
+    </inkml:brush>
+  </inkml:definitions>
+  <inkml:trace contextRef="#ctx0" brushRef="#br0">1100 221,'13'0,"10"0,12 0,12 0,-1 0,1 0,0 0,-11 1,-15 2,-7 1,-5-1,-5 0,-1-1,0 0,3 0,1 1,1 1,1-1,0 0,1 0,-1-1,0 0,-2 0,-2-1,-1 0,-1-1,0 1,1-1,-1 0,0 0,4 2,2 1,1 0,-2 1,-2-2,-3 0,-1 1,-2 0,-4 0,1-1,-2 1,-6 4,-9 4,-6 1,0-1,0-3,-3 0,1-2,3-2,1-2,2 0,5-2,4 0,2 0,1-2,-1-2,0 0,-1 0,2 1,1 1,1 0,1 0,0 1,0 0,-1-1,0 1,-1 0,0-2,0 1,1-1,2 0,-2 0,1 1,1-1,0 1,1 0,1-1,0 1,1-2,0 0,1-2,0-1,1 1,0 0,0 2,1 1,0-1,0 1,0-1,0-1,1 1,0-1,0 2,2 3</inkml:trace>
+</inkml:ink>
+</file>
+
+<file path=ppt/ink/ink31.xml><?xml version="1.0" encoding="utf-8"?>
+<inkml:ink xmlns:inkml="http://www.w3.org/2003/InkML">
+  <inkml:definitions>
+    <inkml:context xml:id="ctx0">
+      <inkml:inkSource xml:id="inkSrc0">
+        <inkml:traceFormat>
+          <inkml:channel name="X" type="integer" units="cm"/>
+          <inkml:channel name="Y" type="integer" units="cm"/>
+        </inkml:traceFormat>
+        <inkml:channelProperties>
+          <inkml:channelProperty channel="X" name="resolution" value="28.3464566929134" units="1/cm"/>
+          <inkml:channelProperty channel="Y" name="resolution" value="28.3464566929134" units="1/cm"/>
+        </inkml:channelProperties>
+      </inkml:inkSource>
+      <inkml:timestamp xml:id="ts0" timeString="2026-03-27T17:05:03"/>
+    </inkml:context>
+    <inkml:brush xml:id="br0">
+      <inkml:brushProperty name="width" value="0.09701" units="cm"/>
+      <inkml:brushProperty name="height" value="0.09701" units="cm"/>
+      <inkml:brushProperty name="color" value="#c00000"/>
+      <inkml:brushProperty name="ignorePressure" value="0"/>
+    </inkml:brush>
+  </inkml:definitions>
+  <inkml:trace contextRef="#ctx0" brushRef="#br0">1299 429,'-3'1,"0"-1,-1 0,1 0,-1 0,-2 0,-3 2,-1 1,1 1,0 0,1 2,0 2,-3 4,0 2,1 0,1-1,2 0,1 0,0-2,1 2,-1 1,2 1,1 0,0 3,0 3,1 1,1-2,1 2,0 3,0-3,1-1,3-2,0-3,2-1,2 0,2-2,1-1,2-2,1-1,9 1,4-1,3-4,4-1,-3-2,-4 0,0 0,-3 0,-6-2,5-1,6-2,-7-1,-1 1,-3-1,-4 0,0-2,1-2,2-4,2-2,0-6,0-5,-5 0,-1-1,-2 2,-4 3,-4 1,-1-4,-4 4,-4 0,-4 2,-1 6,-6 0,-8 0,-8-2,-6-1,-3 2,0 3,0 2,7 3,5-1,7 1,10 1</inkml:trace>
+</inkml:ink>
+</file>
+
+<file path=ppt/ink/ink32.xml><?xml version="1.0" encoding="utf-8"?>
+<inkml:ink xmlns:inkml="http://www.w3.org/2003/InkML">
+  <inkml:definitions>
+    <inkml:context xml:id="ctx0">
+      <inkml:inkSource xml:id="inkSrc0">
+        <inkml:traceFormat>
+          <inkml:channel name="X" type="integer" units="cm"/>
+          <inkml:channel name="Y" type="integer" units="cm"/>
+        </inkml:traceFormat>
+        <inkml:channelProperties>
+          <inkml:channelProperty channel="X" name="resolution" value="28.3464566929134" units="1/cm"/>
+          <inkml:channelProperty channel="Y" name="resolution" value="28.3464566929134" units="1/cm"/>
+        </inkml:channelProperties>
+      </inkml:inkSource>
+      <inkml:timestamp xml:id="ts0" timeString="2026-03-27T17:05:03"/>
+    </inkml:context>
+    <inkml:brush xml:id="br0">
+      <inkml:brushProperty name="width" value="0.09701" units="cm"/>
+      <inkml:brushProperty name="height" value="0.09701" units="cm"/>
+      <inkml:brushProperty name="color" value="#c00000"/>
+      <inkml:brushProperty name="ignorePressure" value="0"/>
+    </inkml:brush>
+  </inkml:definitions>
+  <inkml:trace contextRef="#ctx0" brushRef="#br0">278 1725,'7'-1,"35"1,25 0,-7 0,-1 0,-3 0,-9 0,2 0,2 0,-8 0,-9 1,-2 0,-4-1,-5 0,-4 0,-1 0,-3 1,-2 1,-1 0,0-1,1-1,-1 0,1 0,0 1,0-1,-2 1,-1-1,0 0,-1 0,1 0,-2 0,-1 1,0-1,0 0,0 0,1 0,1 0,-2 0,1 0,-1 0,0 0,1 0,2 0,1 0,-2 1,-1-1,-1 1,0 0,0-1,1 0,0 0</inkml:trace>
+</inkml:ink>
+</file>
+
+<file path=ppt/ink/ink33.xml><?xml version="1.0" encoding="utf-8"?>
+<inkml:ink xmlns:inkml="http://www.w3.org/2003/InkML">
+  <inkml:definitions>
+    <inkml:context xml:id="ctx0">
+      <inkml:inkSource xml:id="inkSrc0">
+        <inkml:traceFormat>
+          <inkml:channel name="X" type="integer" units="cm"/>
+          <inkml:channel name="Y" type="integer" units="cm"/>
+        </inkml:traceFormat>
+        <inkml:channelProperties>
+          <inkml:channelProperty channel="X" name="resolution" value="28.3464566929134" units="1/cm"/>
+          <inkml:channelProperty channel="Y" name="resolution" value="28.3464566929134" units="1/cm"/>
+        </inkml:channelProperties>
+      </inkml:inkSource>
+      <inkml:timestamp xml:id="ts0" timeString="2026-03-27T17:05:03"/>
+    </inkml:context>
+    <inkml:brush xml:id="br0">
+      <inkml:brushProperty name="width" value="0.09701" units="cm"/>
+      <inkml:brushProperty name="height" value="0.09701" units="cm"/>
+      <inkml:brushProperty name="color" value="#c00000"/>
+      <inkml:brushProperty name="ignorePressure" value="0"/>
+    </inkml:brush>
+  </inkml:definitions>
+  <inkml:trace contextRef="#ctx0" brushRef="#br0">1378 1722,'8'0,"34"0,28 0,-2 0,-18 0,-23 0,-11 0,-10 0</inkml:trace>
+</inkml:ink>
+</file>
+
+<file path=ppt/ink/ink34.xml><?xml version="1.0" encoding="utf-8"?>
+<inkml:ink xmlns:inkml="http://www.w3.org/2003/InkML">
+  <inkml:definitions>
+    <inkml:context xml:id="ctx0">
+      <inkml:inkSource xml:id="inkSrc0">
+        <inkml:traceFormat>
+          <inkml:channel name="X" type="integer" units="cm"/>
+          <inkml:channel name="Y" type="integer" units="cm"/>
+        </inkml:traceFormat>
+        <inkml:channelProperties>
+          <inkml:channelProperty channel="X" name="resolution" value="28.3464566929134" units="1/cm"/>
+          <inkml:channelProperty channel="Y" name="resolution" value="28.3464566929134" units="1/cm"/>
+        </inkml:channelProperties>
+      </inkml:inkSource>
+      <inkml:timestamp xml:id="ts0" timeString="2026-03-27T17:05:03"/>
+    </inkml:context>
+    <inkml:brush xml:id="br0">
+      <inkml:brushProperty name="width" value="0.09701" units="cm"/>
+      <inkml:brushProperty name="height" value="0.09701" units="cm"/>
+      <inkml:brushProperty name="color" value="#c00000"/>
+      <inkml:brushProperty name="ignorePressure" value="0"/>
+    </inkml:brush>
+  </inkml:definitions>
+  <inkml:trace contextRef="#ctx0" brushRef="#br0">895 1629,'-10'0,"-3"0,0 1,5 0,3 1,0 0,4 1,0 1,1 2,0 2,3 1,2 0,2-2,0-1,4 1,2 0,1 0,1-1,1-1,-1-1,1-2,1-2,2 0,-2 0,0-2,-1-2,-2 0,-1-1,-2 1,0 0,0 1,-1 0,0 0,0 0,-2 0,-2 1,-1-1,-1 1,0-2,-3 0,0-3,-1 0,0 0,-2 0,-2 0,-2 1,-1 1,-4-1,-8 0,-8 0,-8-1,-6 3,-3 2,8 1,5 1,3 1,8 1,7-1,4 1,5-2</inkml:trace>
+</inkml:ink>
+</file>
+
+<file path=ppt/ink/ink35.xml><?xml version="1.0" encoding="utf-8"?>
+<inkml:ink xmlns:inkml="http://www.w3.org/2003/InkML">
+  <inkml:definitions>
+    <inkml:context xml:id="ctx0">
+      <inkml:inkSource xml:id="inkSrc0">
+        <inkml:traceFormat>
+          <inkml:channel name="X" type="integer" units="cm"/>
+          <inkml:channel name="Y" type="integer" units="cm"/>
+        </inkml:traceFormat>
+        <inkml:channelProperties>
+          <inkml:channelProperty channel="X" name="resolution" value="28.3464566929134" units="1/cm"/>
+          <inkml:channelProperty channel="Y" name="resolution" value="28.3464566929134" units="1/cm"/>
+        </inkml:channelProperties>
+      </inkml:inkSource>
+      <inkml:timestamp xml:id="ts0" timeString="2026-03-27T17:05:03"/>
+    </inkml:context>
+    <inkml:brush xml:id="br0">
+      <inkml:brushProperty name="width" value="0.09701" units="cm"/>
+      <inkml:brushProperty name="height" value="0.09701" units="cm"/>
+      <inkml:brushProperty name="color" value="#c00000"/>
+      <inkml:brushProperty name="ignorePressure" value="0"/>
+    </inkml:brush>
+  </inkml:definitions>
+  <inkml:trace contextRef="#ctx0" brushRef="#br0">226 1248,'0'3,"-1"5,-1 5,1 2,1-5,0-3,1-1,4-1,4-1,4-2,2-1,-2 0,-1-2,0-4,-2-2,1-4,-2-3,-1-2,-3 1,-3 2,-2 3,-3 4,-5 2,-2 2,-2 1,2 1,3 1,0 1,3 0,1 1</inkml:trace>
+</inkml:ink>
+</file>
+
+<file path=ppt/ink/ink36.xml><?xml version="1.0" encoding="utf-8"?>
+<inkml:ink xmlns:inkml="http://www.w3.org/2003/InkML">
+  <inkml:definitions>
+    <inkml:context xml:id="ctx0">
+      <inkml:inkSource xml:id="inkSrc0">
+        <inkml:traceFormat>
+          <inkml:channel name="X" type="integer" units="cm"/>
+          <inkml:channel name="Y" type="integer" units="cm"/>
+        </inkml:traceFormat>
+        <inkml:channelProperties>
+          <inkml:channelProperty channel="X" name="resolution" value="28.3464566929134" units="1/cm"/>
+          <inkml:channelProperty channel="Y" name="resolution" value="28.3464566929134" units="1/cm"/>
+        </inkml:channelProperties>
+      </inkml:inkSource>
+      <inkml:timestamp xml:id="ts0" timeString="2026-03-27T17:05:03"/>
+    </inkml:context>
+    <inkml:brush xml:id="br0">
+      <inkml:brushProperty name="width" value="0.09701" units="cm"/>
+      <inkml:brushProperty name="height" value="0.09701" units="cm"/>
+      <inkml:brushProperty name="color" value="#c00000"/>
+      <inkml:brushProperty name="ignorePressure" value="0"/>
+    </inkml:brush>
+  </inkml:definitions>
+  <inkml:trace contextRef="#ctx0" brushRef="#br0">317 1268,'8'6,"1"1,-2 1,-1 1,1 1,-1 0,1 2,-1-1,-2-1,-1-3,0 0,-1 0,0 1,0-1,0 2,-1 0,0-2,1 2,0 0,0 1,1 0,-1 0,0 0,-1 0,1 1,-1-3,0 1,0 2,1-2,-1-3,0 2,0-1,0 1,0-2,-1-1,1-1,-1-1,-5-6</inkml:trace>
+</inkml:ink>
+</file>
+
+<file path=ppt/ink/ink37.xml><?xml version="1.0" encoding="utf-8"?>
+<inkml:ink xmlns:inkml="http://www.w3.org/2003/InkML">
+  <inkml:definitions>
+    <inkml:context xml:id="ctx0">
+      <inkml:inkSource xml:id="inkSrc0">
+        <inkml:traceFormat>
+          <inkml:channel name="X" type="integer" units="cm"/>
+          <inkml:channel name="Y" type="integer" units="cm"/>
+        </inkml:traceFormat>
+        <inkml:channelProperties>
+          <inkml:channelProperty channel="X" name="resolution" value="28.3464566929134" units="1/cm"/>
+          <inkml:channelProperty channel="Y" name="resolution" value="28.3464566929134" units="1/cm"/>
+        </inkml:channelProperties>
+      </inkml:inkSource>
+      <inkml:timestamp xml:id="ts0" timeString="2026-03-27T17:05:03"/>
+    </inkml:context>
+    <inkml:brush xml:id="br0">
+      <inkml:brushProperty name="width" value="0.09701" units="cm"/>
+      <inkml:brushProperty name="height" value="0.09701" units="cm"/>
+      <inkml:brushProperty name="color" value="#c00000"/>
+      <inkml:brushProperty name="ignorePressure" value="0"/>
+    </inkml:brush>
+  </inkml:definitions>
+  <inkml:trace contextRef="#ctx0" brushRef="#br0">388 1539,'4'2,"3"3,0 0,-2 0,-1-2,-2 0,0 0,1 2,1 0,-1-2,0 0,1-1,-2-6,-1-3,2-4,2-1,0 1,-1 4,-2 2,0 2</inkml:trace>
+</inkml:ink>
+</file>
+
+<file path=ppt/ink/ink38.xml><?xml version="1.0" encoding="utf-8"?>
+<inkml:ink xmlns:inkml="http://www.w3.org/2003/InkML">
+  <inkml:definitions>
+    <inkml:context xml:id="ctx0">
+      <inkml:inkSource xml:id="inkSrc0">
+        <inkml:traceFormat>
+          <inkml:channel name="X" type="integer" units="cm"/>
+          <inkml:channel name="Y" type="integer" units="cm"/>
+        </inkml:traceFormat>
+        <inkml:channelProperties>
+          <inkml:channelProperty channel="X" name="resolution" value="28.3464566929134" units="1/cm"/>
+          <inkml:channelProperty channel="Y" name="resolution" value="28.3464566929134" units="1/cm"/>
+        </inkml:channelProperties>
+      </inkml:inkSource>
+      <inkml:timestamp xml:id="ts0" timeString="2026-03-27T17:05:03"/>
+    </inkml:context>
+    <inkml:brush xml:id="br0">
+      <inkml:brushProperty name="width" value="0.09701" units="cm"/>
+      <inkml:brushProperty name="height" value="0.09701" units="cm"/>
+      <inkml:brushProperty name="color" value="#c00000"/>
+      <inkml:brushProperty name="ignorePressure" value="0"/>
+    </inkml:brush>
+  </inkml:definitions>
+  <inkml:trace contextRef="#ctx0" brushRef="#br0">425 1707,'-7'-2,"1"-1,0 0,2 0,-1-2,1 1,1 0,2 0,1 1,0 0,1 0,3-1,9-3,11-2,7 2,-2 3,-4 2,-4 2,-6 0,-1 1,0 2,-1 1,-2 1,-2-1,-1 1,-1 0,0 2,-1 0,-2-1,-2 0,1 0,-2-2,-2 0,-1-1,-4 1,-1 2,-3 1,1-2,1-2,1 0,-2 0,-1-1,-1-1,0-1,2 0,3-1,1-1,2-1,0 0,-1-2,0-3,0 0,2-1,2 1,2 1</inkml:trace>
+</inkml:ink>
+</file>
+
+<file path=ppt/ink/ink39.xml><?xml version="1.0" encoding="utf-8"?>
+<inkml:ink xmlns:inkml="http://www.w3.org/2003/InkML">
+  <inkml:definitions>
+    <inkml:context xml:id="ctx0">
+      <inkml:inkSource xml:id="inkSrc0">
+        <inkml:traceFormat>
+          <inkml:channel name="X" type="integer" units="cm"/>
+          <inkml:channel name="Y" type="integer" units="cm"/>
+        </inkml:traceFormat>
+        <inkml:channelProperties>
+          <inkml:channelProperty channel="X" name="resolution" value="28.3464566929134" units="1/cm"/>
+          <inkml:channelProperty channel="Y" name="resolution" value="28.3464566929134" units="1/cm"/>
+        </inkml:channelProperties>
+      </inkml:inkSource>
+      <inkml:timestamp xml:id="ts0" timeString="2026-03-27T17:05:03"/>
+    </inkml:context>
+    <inkml:brush xml:id="br0">
+      <inkml:brushProperty name="width" value="0.09701" units="cm"/>
+      <inkml:brushProperty name="height" value="0.09701" units="cm"/>
+      <inkml:brushProperty name="color" value="#c00000"/>
+      <inkml:brushProperty name="ignorePressure" value="0"/>
+    </inkml:brush>
+  </inkml:definitions>
+  <inkml:trace contextRef="#ctx0" brushRef="#br0">917 1630,'4'0,"3"0,5 0,6 0,0 0,1 0,-1 0,0 0,-5 0,-2 0,1 0,-1 0,-1 0,2 0,2 0,-3 0,-2 1,-2 0,0 0,0 0,-1-1,0 1,-1 0,0-1,0 1,2-1,0 0,1 0,0 1,0 0,1 1,0-1,-1 0,1 1,-1 1,-2-2,-3 0,0 1,1-2,0 0,1 2,2 0,1 0,-1 1,-1-2,-3 0</inkml:trace>
+</inkml:ink>
+</file>
+
+<file path=ppt/ink/ink4.xml><?xml version="1.0" encoding="utf-8"?>
+<inkml:ink xmlns:inkml="http://www.w3.org/2003/InkML">
+  <inkml:definitions>
+    <inkml:context xml:id="ctx0">
+      <inkml:inkSource xml:id="inkSrc0">
+        <inkml:traceFormat>
+          <inkml:channel name="X" type="integer" units="cm"/>
+          <inkml:channel name="Y" type="integer" units="cm"/>
+        </inkml:traceFormat>
+        <inkml:channelProperties>
+          <inkml:channelProperty channel="X" name="resolution" value="28.3464566929134" units="1/cm"/>
+          <inkml:channelProperty channel="Y" name="resolution" value="28.3464566929134" units="1/cm"/>
+        </inkml:channelProperties>
+      </inkml:inkSource>
+      <inkml:timestamp xml:id="ts0" timeString="2026-03-27T17:05:03"/>
+    </inkml:context>
+    <inkml:brush xml:id="br0">
+      <inkml:brushProperty name="width" value="0.09701" units="cm"/>
+      <inkml:brushProperty name="height" value="0.09701" units="cm"/>
+      <inkml:brushProperty name="color" value="#c00000"/>
+      <inkml:brushProperty name="ignorePressure" value="0"/>
+    </inkml:brush>
+  </inkml:definitions>
+  <inkml:trace contextRef="#ctx0" brushRef="#br0">1200 1981,'12'-1,"7"1,7 0,7 0,4 0,-3 0,-2 0,-4 1,-3 0,-2 1,-3 0,-5-1,-4 0,-2 0,0-1,-2 0,-1 0,-2 0,0 0,0 0,2 0,1 0,3 0,0 0,1 1,-3-1,0 0,1 1,1-1,-1 0,0 1,1-1,-2 0,-2 0,0 0,-1 0,0 0,0-1,-1 1,-1 0,1-1,0 1,2 0,1-1,0 0,0 1,0 0,-2 0,-1-1,-1 1,2 0,1-1,0 0,1 1,0 0,-2 0,-1 0,0 0,0 0,2-1,-2 1,2 0,-1 0,0-1</inkml:trace>
+</inkml:ink>
+</file>
+
+<file path=ppt/ink/ink40.xml><?xml version="1.0" encoding="utf-8"?>
+<inkml:ink xmlns:inkml="http://www.w3.org/2003/InkML">
+  <inkml:definitions>
+    <inkml:context xml:id="ctx0">
+      <inkml:inkSource xml:id="inkSrc0">
+        <inkml:traceFormat>
+          <inkml:channel name="X" type="integer" units="cm"/>
+          <inkml:channel name="Y" type="integer" units="cm"/>
+        </inkml:traceFormat>
+        <inkml:channelProperties>
+          <inkml:channelProperty channel="X" name="resolution" value="28.3464566929134" units="1/cm"/>
+          <inkml:channelProperty channel="Y" name="resolution" value="28.3464566929134" units="1/cm"/>
+        </inkml:channelProperties>
+      </inkml:inkSource>
+      <inkml:timestamp xml:id="ts0" timeString="2026-03-27T17:05:03"/>
+    </inkml:context>
+    <inkml:brush xml:id="br0">
+      <inkml:brushProperty name="width" value="0.09701" units="cm"/>
+      <inkml:brushProperty name="height" value="0.09701" units="cm"/>
+      <inkml:brushProperty name="color" value="#c00000"/>
+      <inkml:brushProperty name="ignorePressure" value="0"/>
+    </inkml:brush>
+  </inkml:definitions>
+  <inkml:trace contextRef="#ctx0" brushRef="#br0">1330 1647,'3'0,"3"0,4 2,-2 1,-3-1,-2-1,-6 2,-3 1,-3 1,-2 2,1-1,2-2,1-1,4-2,0 0,0-5</inkml:trace>
+</inkml:ink>
+</file>
+
+<file path=ppt/ink/ink41.xml><?xml version="1.0" encoding="utf-8"?>
+<inkml:ink xmlns:inkml="http://www.w3.org/2003/InkML">
+  <inkml:definitions>
+    <inkml:context xml:id="ctx0">
+      <inkml:inkSource xml:id="inkSrc0">
+        <inkml:traceFormat>
+          <inkml:channel name="X" type="integer" units="cm"/>
+          <inkml:channel name="Y" type="integer" units="cm"/>
+        </inkml:traceFormat>
+        <inkml:channelProperties>
+          <inkml:channelProperty channel="X" name="resolution" value="28.3464566929134" units="1/cm"/>
+          <inkml:channelProperty channel="Y" name="resolution" value="28.3464566929134" units="1/cm"/>
+        </inkml:channelProperties>
+      </inkml:inkSource>
+      <inkml:timestamp xml:id="ts0" timeString="2026-03-27T17:05:03"/>
+    </inkml:context>
+    <inkml:brush xml:id="br0">
+      <inkml:brushProperty name="width" value="0.09701" units="cm"/>
+      <inkml:brushProperty name="height" value="0.09701" units="cm"/>
+      <inkml:brushProperty name="color" value="#c00000"/>
+      <inkml:brushProperty name="ignorePressure" value="0"/>
+    </inkml:brush>
+  </inkml:definitions>
+  <inkml:trace contextRef="#ctx0" brushRef="#br0">1445 1634,'-12'-1,"-2"3,2 2,0 2,4-2,4 0,0 0,2 0,0 1,1 1,0 1,1-1,1 2,1 0,3-1,2 0,0-1,2-1,3 0,3 0,2-1,0 0,0-1,-3-2,-1-1,0-1,-3-1,-2-1,1-1,-2-2,0-1,-2 0,0 1,-2 1,-1 1,0 1,-1-1,1 0,-1 0,-1 1,0-3,-1 2,-3-1,-2 0,-1 0,-2 1,-3-2,-2 0,0 2,0 2,-1 1,1 1,1 0,4 0,3 0,3 0,0 0,-2 0</inkml:trace>
+</inkml:ink>
+</file>
+
+<file path=ppt/ink/ink42.xml><?xml version="1.0" encoding="utf-8"?>
+<inkml:ink xmlns:inkml="http://www.w3.org/2003/InkML">
+  <inkml:definitions>
+    <inkml:context xml:id="ctx0">
+      <inkml:inkSource xml:id="inkSrc0">
+        <inkml:traceFormat>
+          <inkml:channel name="X" type="integer" units="cm"/>
+          <inkml:channel name="Y" type="integer" units="cm"/>
+        </inkml:traceFormat>
+        <inkml:channelProperties>
+          <inkml:channelProperty channel="X" name="resolution" value="28.3464566929134" units="1/cm"/>
+          <inkml:channelProperty channel="Y" name="resolution" value="28.3464566929134" units="1/cm"/>
+        </inkml:channelProperties>
+      </inkml:inkSource>
+      <inkml:timestamp xml:id="ts0" timeString="2026-03-27T17:05:03"/>
+    </inkml:context>
+    <inkml:brush xml:id="br0">
+      <inkml:brushProperty name="width" value="0.09701" units="cm"/>
+      <inkml:brushProperty name="height" value="0.09701" units="cm"/>
+      <inkml:brushProperty name="color" value="#c00000"/>
+      <inkml:brushProperty name="ignorePressure" value="0"/>
+    </inkml:brush>
+  </inkml:definitions>
+  <inkml:trace contextRef="#ctx0" brushRef="#br0">1491 1621,'4'-1,"4"1,3-2,1 1,-1 1,-2 0,-1 0,0 0,1 0,0 1,1 3,0 0,-2 0,-3 0,-1-1,0 0,-1 1,0 0,0-1,0 0,1 0,2-1,-2 0,0 0,-1-1</inkml:trace>
+</inkml:ink>
+</file>
+
+<file path=ppt/ink/ink43.xml><?xml version="1.0" encoding="utf-8"?>
+<inkml:ink xmlns:inkml="http://www.w3.org/2003/InkML">
+  <inkml:definitions>
+    <inkml:context xml:id="ctx0">
+      <inkml:inkSource xml:id="inkSrc0">
+        <inkml:traceFormat>
+          <inkml:channel name="X" type="integer" units="cm"/>
+          <inkml:channel name="Y" type="integer" units="cm"/>
+        </inkml:traceFormat>
+        <inkml:channelProperties>
+          <inkml:channelProperty channel="X" name="resolution" value="28.3464566929134" units="1/cm"/>
+          <inkml:channelProperty channel="Y" name="resolution" value="28.3464566929134" units="1/cm"/>
+        </inkml:channelProperties>
+      </inkml:inkSource>
+      <inkml:timestamp xml:id="ts0" timeString="2026-03-27T17:05:03"/>
+    </inkml:context>
+    <inkml:brush xml:id="br0">
+      <inkml:brushProperty name="width" value="0.09701" units="cm"/>
+      <inkml:brushProperty name="height" value="0.09701" units="cm"/>
+      <inkml:brushProperty name="color" value="#c00000"/>
+      <inkml:brushProperty name="ignorePressure" value="0"/>
+    </inkml:brush>
+  </inkml:definitions>
+  <inkml:trace contextRef="#ctx0" brushRef="#br0">1648 1646,'5'-1,"-2"1,0 2,-1 1,-7-1,1-1,0 1,0 0,-1 0,-1 0,1 1,0-1,-1 0,2 0,1-1,0-1</inkml:trace>
+</inkml:ink>
+</file>
+
+<file path=ppt/ink/ink44.xml><?xml version="1.0" encoding="utf-8"?>
+<inkml:ink xmlns:inkml="http://www.w3.org/2003/InkML">
+  <inkml:definitions>
+    <inkml:context xml:id="ctx0">
+      <inkml:inkSource xml:id="inkSrc0">
+        <inkml:traceFormat>
+          <inkml:channel name="X" type="integer" units="cm"/>
+          <inkml:channel name="Y" type="integer" units="cm"/>
+        </inkml:traceFormat>
+        <inkml:channelProperties>
+          <inkml:channelProperty channel="X" name="resolution" value="28.3464566929134" units="1/cm"/>
+          <inkml:channelProperty channel="Y" name="resolution" value="28.3464566929134" units="1/cm"/>
+        </inkml:channelProperties>
+      </inkml:inkSource>
+      <inkml:timestamp xml:id="ts0" timeString="2026-03-27T17:05:03"/>
+    </inkml:context>
+    <inkml:brush xml:id="br0">
+      <inkml:brushProperty name="width" value="0.09701" units="cm"/>
+      <inkml:brushProperty name="height" value="0.09701" units="cm"/>
+      <inkml:brushProperty name="color" value="#c00000"/>
+      <inkml:brushProperty name="ignorePressure" value="0"/>
+    </inkml:brush>
+  </inkml:definitions>
+  <inkml:trace contextRef="#ctx0" brushRef="#br0">1730 1613,'-4'-1,"-3"1,-3 0,-1 0,-1 0,3 3,1 1,3-1,0 1,1 0,1 1,0 3,2 0,0 1,0-1,1-1,1-1,3 0,1 1,3 0,3 1,1 0,0-2,-2-2,0-1,-1-1,1-1,0 0,0 0,-2-1,0 0,-1 0,0 0,1-1,-1 1,-1-2,1 0,-1-1,1 0,-1-1,0 0,-1-1,0 0,-2 1,0 0,1-1,-2 1,0-1,0 1,0-1,-1 2,-1-1,-1 0,0-1,-1 0,0 1,0-1,-3-2,-2-2,0 3,1 2,-3 0,-1 2,-3 0,-2 0,-1 1,2 0,2 1,0 0,3 0,3 0,1 0,2 0</inkml:trace>
+</inkml:ink>
+</file>
+
+<file path=ppt/ink/ink45.xml><?xml version="1.0" encoding="utf-8"?>
+<inkml:ink xmlns:inkml="http://www.w3.org/2003/InkML">
+  <inkml:definitions>
+    <inkml:context xml:id="ctx0">
+      <inkml:inkSource xml:id="inkSrc0">
+        <inkml:traceFormat>
+          <inkml:channel name="X" type="integer" units="cm"/>
+          <inkml:channel name="Y" type="integer" units="cm"/>
+        </inkml:traceFormat>
+        <inkml:channelProperties>
+          <inkml:channelProperty channel="X" name="resolution" value="28.3464566929134" units="1/cm"/>
+          <inkml:channelProperty channel="Y" name="resolution" value="28.3464566929134" units="1/cm"/>
+        </inkml:channelProperties>
+      </inkml:inkSource>
+      <inkml:timestamp xml:id="ts0" timeString="2026-03-27T17:05:03"/>
+    </inkml:context>
+    <inkml:brush xml:id="br0">
+      <inkml:brushProperty name="width" value="0.09701" units="cm"/>
+      <inkml:brushProperty name="height" value="0.09701" units="cm"/>
+      <inkml:brushProperty name="color" value="#c00000"/>
+      <inkml:brushProperty name="ignorePressure" value="0"/>
+    </inkml:brush>
+  </inkml:definitions>
+  <inkml:trace contextRef="#ctx0" brushRef="#br0">1828 1608,'10'0,"9"0,8 0,-4 0,-4 1,-6 1,-6 0,-2-1,-2 1,0 0,0 1,2 0,0 0,-1-1,-1-1</inkml:trace>
+</inkml:ink>
+</file>
+
+<file path=ppt/ink/ink46.xml><?xml version="1.0" encoding="utf-8"?>
+<inkml:ink xmlns:inkml="http://www.w3.org/2003/InkML">
+  <inkml:definitions>
+    <inkml:context xml:id="ctx0">
+      <inkml:inkSource xml:id="inkSrc0">
+        <inkml:traceFormat>
+          <inkml:channel name="X" type="integer" units="cm"/>
+          <inkml:channel name="Y" type="integer" units="cm"/>
+        </inkml:traceFormat>
+        <inkml:channelProperties>
+          <inkml:channelProperty channel="X" name="resolution" value="28.3464566929134" units="1/cm"/>
+          <inkml:channelProperty channel="Y" name="resolution" value="28.3464566929134" units="1/cm"/>
+        </inkml:channelProperties>
+      </inkml:inkSource>
+      <inkml:timestamp xml:id="ts0" timeString="2026-03-27T17:05:03"/>
+    </inkml:context>
+    <inkml:brush xml:id="br0">
+      <inkml:brushProperty name="width" value="0.09701" units="cm"/>
+      <inkml:brushProperty name="height" value="0.09701" units="cm"/>
+      <inkml:brushProperty name="color" value="#c00000"/>
+      <inkml:brushProperty name="ignorePressure" value="0"/>
+    </inkml:brush>
+  </inkml:definitions>
+  <inkml:trace contextRef="#ctx0" brushRef="#br0">1971 1614,'6'4,"-1"-1,-2-1,-7 0,-7 0,-3 0,3-1,2 0,4 0,2 0</inkml:trace>
+</inkml:ink>
+</file>
+
+<file path=ppt/ink/ink47.xml><?xml version="1.0" encoding="utf-8"?>
+<inkml:ink xmlns:inkml="http://www.w3.org/2003/InkML">
+  <inkml:definitions>
+    <inkml:context xml:id="ctx0">
+      <inkml:inkSource xml:id="inkSrc0">
+        <inkml:traceFormat>
+          <inkml:channel name="X" type="integer" units="cm"/>
+          <inkml:channel name="Y" type="integer" units="cm"/>
+        </inkml:traceFormat>
+        <inkml:channelProperties>
+          <inkml:channelProperty channel="X" name="resolution" value="28.3464566929134" units="1/cm"/>
+          <inkml:channelProperty channel="Y" name="resolution" value="28.3464566929134" units="1/cm"/>
+        </inkml:channelProperties>
+      </inkml:inkSource>
+      <inkml:timestamp xml:id="ts0" timeString="2026-03-27T17:05:03"/>
+    </inkml:context>
+    <inkml:brush xml:id="br0">
+      <inkml:brushProperty name="width" value="0.09701" units="cm"/>
+      <inkml:brushProperty name="height" value="0.09701" units="cm"/>
+      <inkml:brushProperty name="color" value="#c00000"/>
+      <inkml:brushProperty name="ignorePressure" value="0"/>
+    </inkml:brush>
+  </inkml:definitions>
+  <inkml:trace contextRef="#ctx0" brushRef="#br0">1545 1256,'-6'4,"-1"0,0 1,0 1,0 2,-1 2,0 2,1-1,3 0,1 0,1 2,1 3,1 1,0-3,0-7,2-1,1 1,1-2,1 0,1 0,0 0,-1-2,-1-1,-1-1,1-1,1 0,3 0,3-1,3 1,3 0,2 0,-1 0,-2 0,-1-1,-3-2,-1-2,-1-5,3-11,2-19,2-10,-1-5,-4 1,-6 9,-5-5,-2-12,-1 2,1 11,1 5,-3 5,-5 3,-2 7,2 9,1 5,3 5,2 4,0 1,1 2,0-1,-2 2</inkml:trace>
+</inkml:ink>
+</file>
+
+<file path=ppt/ink/ink48.xml><?xml version="1.0" encoding="utf-8"?>
+<inkml:ink xmlns:inkml="http://www.w3.org/2003/InkML">
+  <inkml:definitions>
+    <inkml:context xml:id="ctx0">
+      <inkml:inkSource xml:id="inkSrc0">
+        <inkml:traceFormat>
+          <inkml:channel name="X" type="integer" units="cm"/>
+          <inkml:channel name="Y" type="integer" units="cm"/>
+        </inkml:traceFormat>
+        <inkml:channelProperties>
+          <inkml:channelProperty channel="X" name="resolution" value="28.3464566929134" units="1/cm"/>
+          <inkml:channelProperty channel="Y" name="resolution" value="28.3464566929134" units="1/cm"/>
+        </inkml:channelProperties>
+      </inkml:inkSource>
+      <inkml:timestamp xml:id="ts0" timeString="2026-03-27T17:05:03"/>
+    </inkml:context>
+    <inkml:brush xml:id="br0">
+      <inkml:brushProperty name="width" value="0.09701" units="cm"/>
+      <inkml:brushProperty name="height" value="0.09701" units="cm"/>
+      <inkml:brushProperty name="color" value="#c00000"/>
+      <inkml:brushProperty name="ignorePressure" value="0"/>
+    </inkml:brush>
+  </inkml:definitions>
+  <inkml:trace contextRef="#ctx0" brushRef="#br0">1679 519,'-3'-2,"0"2,-4 2,-3 2,-2 5,-1 4,1 3,-1 6,-3 13,2 8,4 1,7 0,2 3,1 12,0 0,0-13,2-8,2-7,3 1,2 1,3-1,-1-5,-1-5,0-1,-1-5,-1-1,-1 0,-1 1,-1-2,-2-2,-1-5,-1-2,1-1,0-1,-5-5</inkml:trace>
+</inkml:ink>
+</file>
+
+<file path=ppt/ink/ink49.xml><?xml version="1.0" encoding="utf-8"?>
+<inkml:ink xmlns:inkml="http://www.w3.org/2003/InkML">
+  <inkml:definitions>
+    <inkml:context xml:id="ctx0">
+      <inkml:inkSource xml:id="inkSrc0">
+        <inkml:traceFormat>
+          <inkml:channel name="X" type="integer" units="cm"/>
+          <inkml:channel name="Y" type="integer" units="cm"/>
+        </inkml:traceFormat>
+        <inkml:channelProperties>
+          <inkml:channelProperty channel="X" name="resolution" value="28.3464566929134" units="1/cm"/>
+          <inkml:channelProperty channel="Y" name="resolution" value="28.3464566929134" units="1/cm"/>
+        </inkml:channelProperties>
+      </inkml:inkSource>
+      <inkml:timestamp xml:id="ts0" timeString="2026-03-27T17:05:03"/>
+    </inkml:context>
+    <inkml:brush xml:id="br0">
+      <inkml:brushProperty name="width" value="0.09701" units="cm"/>
+      <inkml:brushProperty name="height" value="0.09701" units="cm"/>
+      <inkml:brushProperty name="color" value="#c00000"/>
+      <inkml:brushProperty name="ignorePressure" value="0"/>
+    </inkml:brush>
+  </inkml:definitions>
+  <inkml:trace contextRef="#ctx0" brushRef="#br0">2552 440,'-9'2,"-9"6,-8 8,5 1,1 4,0 3,6-1,-1 7,1 6,4 3,2 2,4-2,3 3,0 2,0-10,1-7,0-4,0-5,0 0,0 0,0 1,-1-3,0-3,-2-2,-3 5,0 1,0-1,2-3,2-3,1-3,0-3,1-1,-1 6,-2 3,-3 3,-4 6,-1 2,0-2,2-1,3-6,2-2,1 1,0-3,1 1,0 1,-1 0,0-1,0 0,2-2,0-3,0 0,1 0,0 0,0 0,0-1,0 1,0-1,1 0,1 1,2-6,3 1,0 2,-1 1,-1-1,-1 0,0-4,2-3,5 1,7 0,4-1,-2-1,0-2,-3-3,-8 4,-4 3,2-1,0-2,-4 1,1-1,0-2,-1-1,0 0,1-5,0-4,2-13,3-14,-3 3,-3 9,-2 5,-1 5,-2 7,-3 3,-1 3,0-1,0 0,0 0</inkml:trace>
+</inkml:ink>
+</file>
+
+<file path=ppt/ink/ink5.xml><?xml version="1.0" encoding="utf-8"?>
+<inkml:ink xmlns:inkml="http://www.w3.org/2003/InkML">
+  <inkml:definitions>
+    <inkml:context xml:id="ctx0">
+      <inkml:inkSource xml:id="inkSrc0">
+        <inkml:traceFormat>
+          <inkml:channel name="X" type="integer" units="cm"/>
+          <inkml:channel name="Y" type="integer" units="cm"/>
+        </inkml:traceFormat>
+        <inkml:channelProperties>
+          <inkml:channelProperty channel="X" name="resolution" value="28.3464566929134" units="1/cm"/>
+          <inkml:channelProperty channel="Y" name="resolution" value="28.3464566929134" units="1/cm"/>
+        </inkml:channelProperties>
+      </inkml:inkSource>
+      <inkml:timestamp xml:id="ts0" timeString="2026-03-27T17:05:03"/>
+    </inkml:context>
+    <inkml:brush xml:id="br0">
+      <inkml:brushProperty name="width" value="0.09701" units="cm"/>
+      <inkml:brushProperty name="height" value="0.09701" units="cm"/>
+      <inkml:brushProperty name="color" value="#c00000"/>
+      <inkml:brushProperty name="ignorePressure" value="0"/>
+    </inkml:brush>
+  </inkml:definitions>
+  <inkml:trace contextRef="#ctx0" brushRef="#br0">1849 1981,'24'0,"-1"0,2 0,3 0,2 0,-7 0,-2 0,-3 0,-5 0,-1 0,-1 0,-2 0,0 0,-1 0,-1 0,-2 0,-1 0,1 0,1-1,0 1,-1 0,0-1,-1 1,0-1,0 1,0-1,0 1,-1 0,0 0</inkml:trace>
+</inkml:ink>
+</file>
+
+<file path=ppt/ink/ink50.xml><?xml version="1.0" encoding="utf-8"?>
+<inkml:ink xmlns:inkml="http://www.w3.org/2003/InkML">
+  <inkml:definitions>
+    <inkml:context xml:id="ctx0">
+      <inkml:inkSource xml:id="inkSrc0">
+        <inkml:traceFormat>
+          <inkml:channel name="X" type="integer" units="cm"/>
+          <inkml:channel name="Y" type="integer" units="cm"/>
+        </inkml:traceFormat>
+        <inkml:channelProperties>
+          <inkml:channelProperty channel="X" name="resolution" value="28.3464566929134" units="1/cm"/>
+          <inkml:channelProperty channel="Y" name="resolution" value="28.3464566929134" units="1/cm"/>
+        </inkml:channelProperties>
+      </inkml:inkSource>
+      <inkml:timestamp xml:id="ts0" timeString="2026-03-27T17:05:03"/>
+    </inkml:context>
+    <inkml:brush xml:id="br0">
+      <inkml:brushProperty name="width" value="0.09701" units="cm"/>
+      <inkml:brushProperty name="height" value="0.09701" units="cm"/>
+      <inkml:brushProperty name="color" value="#c00000"/>
+      <inkml:brushProperty name="ignorePressure" value="0"/>
+    </inkml:brush>
+  </inkml:definitions>
+  <inkml:trace contextRef="#ctx0" brushRef="#br0">2899 464,'-2'7,"-1"6,-3 6,0 8,2 8,3 5,1 1,0-3,0-10,1-3,0 2,3-5,-1 0,-1 2,-1-4,-2-3,-3-3,-3-1,-3 1,-6 4,-4 3,1-2,-1 3,-3 7,6 1,5 3,4 5,5-5,2-10,2-7,-1-6,2-6,-1-1,-1 2,-3 7,-1 2,-1 4,0 3,2-5,2-5,1-1,0-1,0-2,1-2,0-1,1-1,-1 0,2 1</inkml:trace>
+</inkml:ink>
+</file>
+
+<file path=ppt/ink/ink6.xml><?xml version="1.0" encoding="utf-8"?>
+<inkml:ink xmlns:inkml="http://www.w3.org/2003/InkML">
+  <inkml:definitions>
+    <inkml:context xml:id="ctx0">
+      <inkml:inkSource xml:id="inkSrc0">
+        <inkml:traceFormat>
+          <inkml:channel name="X" type="integer" units="cm"/>
+          <inkml:channel name="Y" type="integer" units="cm"/>
+        </inkml:traceFormat>
+        <inkml:channelProperties>
+          <inkml:channelProperty channel="X" name="resolution" value="28.3464566929134" units="1/cm"/>
+          <inkml:channelProperty channel="Y" name="resolution" value="28.3464566929134" units="1/cm"/>
+        </inkml:channelProperties>
+      </inkml:inkSource>
+      <inkml:timestamp xml:id="ts0" timeString="2026-03-27T17:05:03"/>
+    </inkml:context>
+    <inkml:brush xml:id="br0">
+      <inkml:brushProperty name="width" value="0.09701" units="cm"/>
+      <inkml:brushProperty name="height" value="0.09701" units="cm"/>
+      <inkml:brushProperty name="color" value="#c00000"/>
+      <inkml:brushProperty name="ignorePressure" value="0"/>
+    </inkml:brush>
+  </inkml:definitions>
+  <inkml:trace contextRef="#ctx0" brushRef="#br0">2176 1971,'7'0,"4"0,7 0,1 0,0 0,-6 0,-3 0,0 0,-1 0,-2 0,-2 1,1-1,-1 1,-2-1,0 0,1 0,0 0,0 0,-1 0,0 0,1 0,3 0,2 0,0 0,-3 0,-3-1</inkml:trace>
+</inkml:ink>
+</file>
+
+<file path=ppt/ink/ink7.xml><?xml version="1.0" encoding="utf-8"?>
+<inkml:ink xmlns:inkml="http://www.w3.org/2003/InkML">
+  <inkml:definitions>
+    <inkml:context xml:id="ctx0">
+      <inkml:inkSource xml:id="inkSrc0">
+        <inkml:traceFormat>
+          <inkml:channel name="X" type="integer" units="cm"/>
+          <inkml:channel name="Y" type="integer" units="cm"/>
+        </inkml:traceFormat>
+        <inkml:channelProperties>
+          <inkml:channelProperty channel="X" name="resolution" value="28.3464566929134" units="1/cm"/>
+          <inkml:channelProperty channel="Y" name="resolution" value="28.3464566929134" units="1/cm"/>
+        </inkml:channelProperties>
+      </inkml:inkSource>
+      <inkml:timestamp xml:id="ts0" timeString="2026-03-27T17:05:03"/>
+    </inkml:context>
+    <inkml:brush xml:id="br0">
+      <inkml:brushProperty name="width" value="0.09701" units="cm"/>
+      <inkml:brushProperty name="height" value="0.09701" units="cm"/>
+      <inkml:brushProperty name="color" value="#c00000"/>
+      <inkml:brushProperty name="ignorePressure" value="0"/>
+    </inkml:brush>
+  </inkml:definitions>
+  <inkml:trace contextRef="#ctx0" brushRef="#br0">2487 1986,'58'0,"-6"0,-5 0,-10 0,-14 0,-14 0,-4 0,1-2,-1 0,1 1,-1-1</inkml:trace>
+</inkml:ink>
+</file>
+
+<file path=ppt/ink/ink8.xml><?xml version="1.0" encoding="utf-8"?>
+<inkml:ink xmlns:inkml="http://www.w3.org/2003/InkML">
+  <inkml:definitions>
+    <inkml:context xml:id="ctx0">
+      <inkml:inkSource xml:id="inkSrc0">
+        <inkml:traceFormat>
+          <inkml:channel name="X" type="integer" units="cm"/>
+          <inkml:channel name="Y" type="integer" units="cm"/>
+        </inkml:traceFormat>
+        <inkml:channelProperties>
+          <inkml:channelProperty channel="X" name="resolution" value="28.3464566929134" units="1/cm"/>
+          <inkml:channelProperty channel="Y" name="resolution" value="28.3464566929134" units="1/cm"/>
+        </inkml:channelProperties>
+      </inkml:inkSource>
+      <inkml:timestamp xml:id="ts0" timeString="2026-03-27T17:05:03"/>
+    </inkml:context>
+    <inkml:brush xml:id="br0">
+      <inkml:brushProperty name="width" value="0.09701" units="cm"/>
+      <inkml:brushProperty name="height" value="0.09701" units="cm"/>
+      <inkml:brushProperty name="color" value="#c00000"/>
+      <inkml:brushProperty name="ignorePressure" value="0"/>
+    </inkml:brush>
+  </inkml:definitions>
+  <inkml:trace contextRef="#ctx0" brushRef="#br0">100 1104,'19'0,"16"0,4 0,6 0,-3 0,-5 0,2 0,-9 0,-3 0,-5 0,-1 1,-4 1,-3-2,0 0,1 0,3 0,0 0,0 0,-1-2,-1 1,0 1,-1 0,-2 0,0 1,1 0,-1 1,-1 0,-2 0,1 0,0 0,-1 1,0-2,-1 1,1 0,-1 1,1 0,-3 0,-1-2,-1 0,-1 0,-1-1,5 0,3 1,4 0,-2 2,-1 1,-3-1,-2 0,-1-2,-3 0,1-1</inkml:trace>
+</inkml:ink>
+</file>
+
+<file path=ppt/ink/ink9.xml><?xml version="1.0" encoding="utf-8"?>
+<inkml:ink xmlns:inkml="http://www.w3.org/2003/InkML">
+  <inkml:definitions>
+    <inkml:context xml:id="ctx0">
+      <inkml:inkSource xml:id="inkSrc0">
+        <inkml:traceFormat>
+          <inkml:channel name="X" type="integer" units="cm"/>
+          <inkml:channel name="Y" type="integer" units="cm"/>
+        </inkml:traceFormat>
+        <inkml:channelProperties>
+          <inkml:channelProperty channel="X" name="resolution" value="28.3464566929134" units="1/cm"/>
+          <inkml:channelProperty channel="Y" name="resolution" value="28.3464566929134" units="1/cm"/>
+        </inkml:channelProperties>
+      </inkml:inkSource>
+      <inkml:timestamp xml:id="ts0" timeString="2026-03-27T17:05:03"/>
+    </inkml:context>
+    <inkml:brush xml:id="br0">
+      <inkml:brushProperty name="width" value="0.09701" units="cm"/>
+      <inkml:brushProperty name="height" value="0.09701" units="cm"/>
+      <inkml:brushProperty name="color" value="#c00000"/>
+      <inkml:brushProperty name="ignorePressure" value="0"/>
+    </inkml:brush>
+  </inkml:definitions>
+  <inkml:trace contextRef="#ctx0" brushRef="#br0">162 1193,'10'0,"26"0,30 3,24 4,-9-3,-19-3,-15-1,-18 0,-9 0,-9 0,-4 0,-4 0,1 1,0 0,1-1,2 0,1 0,0 0,-3 0,0 1,1 0,0-1,-1 1,0-1,-2-1</inkml:trace>
+</inkml:ink>
 </file>
 
 <file path=ppt/notesMasters/notesMaster1.xml><?xml version="1.0" encoding="utf-8"?>
@@ -4313,6 +5663,390 @@
           </a:p>
         </p:txBody>
       </p:sp>
+      <mc:AlternateContent xmlns:mc="http://schemas.openxmlformats.org/markup-compatibility/2006" xmlns:p14="http://schemas.microsoft.com/office/powerpoint/2010/main">
+        <mc:Choice Requires="p14">
+          <p:contentPart r:id="rId2" p14:bwMode="auto">
+            <p14:nvContentPartPr>
+              <p14:cNvPr id="6" name="墨迹 5"/>
+              <p14:cNvContentPartPr/>
+              <p14:nvPr/>
+            </p14:nvContentPartPr>
+            <p14:xfrm>
+              <a:off x="333375" y="5508625"/>
+              <a:ext cx="603250" cy="44450"/>
+            </p14:xfrm>
+          </p:contentPart>
+        </mc:Choice>
+        <mc:Fallback xmlns="">
+          <p:pic>
+            <p:nvPicPr>
+              <p:cNvPr id="6" name="墨迹 5"/>
+            </p:nvPicPr>
+            <p:blipFill>
+              <a:blip r:embed="rId3"/>
+            </p:blipFill>
+            <p:spPr>
+              <a:xfrm>
+                <a:off x="333375" y="5508625"/>
+                <a:ext cx="603250" cy="44450"/>
+              </a:xfrm>
+              <a:prstGeom prst="rect"/>
+            </p:spPr>
+          </p:pic>
+        </mc:Fallback>
+      </mc:AlternateContent>
+      <mc:AlternateContent xmlns:mc="http://schemas.openxmlformats.org/markup-compatibility/2006" xmlns:p14="http://schemas.microsoft.com/office/powerpoint/2010/main">
+        <mc:Choice Requires="p14">
+          <p:contentPart r:id="rId4" p14:bwMode="auto">
+            <p14:nvContentPartPr>
+              <p14:cNvPr id="7" name="墨迹 6"/>
+              <p14:cNvContentPartPr/>
+              <p14:nvPr/>
+            </p14:nvContentPartPr>
+            <p14:xfrm>
+              <a:off x="930275" y="2387600"/>
+              <a:ext cx="2571750" cy="31750"/>
+            </p14:xfrm>
+          </p:contentPart>
+        </mc:Choice>
+        <mc:Fallback xmlns="">
+          <p:pic>
+            <p:nvPicPr>
+              <p:cNvPr id="7" name="墨迹 6"/>
+            </p:nvPicPr>
+            <p:blipFill>
+              <a:blip r:embed="rId5"/>
+            </p:blipFill>
+            <p:spPr>
+              <a:xfrm>
+                <a:off x="930275" y="2387600"/>
+                <a:ext cx="2571750" cy="31750"/>
+              </a:xfrm>
+              <a:prstGeom prst="rect"/>
+            </p:spPr>
+          </p:pic>
+        </mc:Fallback>
+      </mc:AlternateContent>
+      <mc:AlternateContent xmlns:mc="http://schemas.openxmlformats.org/markup-compatibility/2006" xmlns:p14="http://schemas.microsoft.com/office/powerpoint/2010/main">
+        <mc:Choice Requires="p14">
+          <p:contentPart r:id="rId6" p14:bwMode="auto">
+            <p14:nvContentPartPr>
+              <p14:cNvPr id="8" name="墨迹 7"/>
+              <p14:cNvContentPartPr/>
+              <p14:nvPr/>
+            </p14:nvContentPartPr>
+            <p14:xfrm>
+              <a:off x="1152525" y="3403600"/>
+              <a:ext cx="977900" cy="3175"/>
+            </p14:xfrm>
+          </p:contentPart>
+        </mc:Choice>
+        <mc:Fallback xmlns="">
+          <p:pic>
+            <p:nvPicPr>
+              <p:cNvPr id="8" name="墨迹 7"/>
+            </p:nvPicPr>
+            <p:blipFill>
+              <a:blip r:embed="rId7"/>
+            </p:blipFill>
+            <p:spPr>
+              <a:xfrm>
+                <a:off x="1152525" y="3403600"/>
+                <a:ext cx="977900" cy="3175"/>
+              </a:xfrm>
+              <a:prstGeom prst="rect"/>
+            </p:spPr>
+          </p:pic>
+        </mc:Fallback>
+      </mc:AlternateContent>
+      <mc:AlternateContent xmlns:mc="http://schemas.openxmlformats.org/markup-compatibility/2006" xmlns:p14="http://schemas.microsoft.com/office/powerpoint/2010/main">
+        <mc:Choice Requires="p14">
+          <p:contentPart r:id="rId8" p14:bwMode="auto">
+            <p14:nvContentPartPr>
+              <p14:cNvPr id="9" name="墨迹 8"/>
+              <p14:cNvContentPartPr/>
+              <p14:nvPr/>
+            </p14:nvContentPartPr>
+            <p14:xfrm>
+              <a:off x="1187450" y="3660775"/>
+              <a:ext cx="463550" cy="360"/>
+            </p14:xfrm>
+          </p:contentPart>
+        </mc:Choice>
+        <mc:Fallback xmlns="">
+          <p:pic>
+            <p:nvPicPr>
+              <p:cNvPr id="9" name="墨迹 8"/>
+            </p:nvPicPr>
+            <p:blipFill>
+              <a:blip r:embed="rId9"/>
+            </p:blipFill>
+            <p:spPr>
+              <a:xfrm>
+                <a:off x="1187450" y="3660775"/>
+                <a:ext cx="463550" cy="360"/>
+              </a:xfrm>
+              <a:prstGeom prst="rect"/>
+            </p:spPr>
+          </p:pic>
+        </mc:Fallback>
+      </mc:AlternateContent>
+      <mc:AlternateContent xmlns:mc="http://schemas.openxmlformats.org/markup-compatibility/2006" xmlns:p14="http://schemas.microsoft.com/office/powerpoint/2010/main">
+        <mc:Choice Requires="p14">
+          <p:contentPart r:id="rId10" p14:bwMode="auto">
+            <p14:nvContentPartPr>
+              <p14:cNvPr id="10" name="墨迹 9"/>
+              <p14:cNvContentPartPr/>
+              <p14:nvPr/>
+            </p14:nvContentPartPr>
+            <p14:xfrm>
+              <a:off x="1003300" y="4035425"/>
+              <a:ext cx="488950" cy="6350"/>
+            </p14:xfrm>
+          </p:contentPart>
+        </mc:Choice>
+        <mc:Fallback xmlns="">
+          <p:pic>
+            <p:nvPicPr>
+              <p:cNvPr id="10" name="墨迹 9"/>
+            </p:nvPicPr>
+            <p:blipFill>
+              <a:blip r:embed="rId11"/>
+            </p:blipFill>
+            <p:spPr>
+              <a:xfrm>
+                <a:off x="1003300" y="4035425"/>
+                <a:ext cx="488950" cy="6350"/>
+              </a:xfrm>
+              <a:prstGeom prst="rect"/>
+            </p:spPr>
+          </p:pic>
+        </mc:Fallback>
+      </mc:AlternateContent>
+      <mc:AlternateContent xmlns:mc="http://schemas.openxmlformats.org/markup-compatibility/2006" xmlns:p14="http://schemas.microsoft.com/office/powerpoint/2010/main">
+        <mc:Choice Requires="p14">
+          <p:contentPart r:id="rId12" p14:bwMode="auto">
+            <p14:nvContentPartPr>
+              <p14:cNvPr id="11" name="墨迹 10"/>
+              <p14:cNvContentPartPr/>
+              <p14:nvPr/>
+            </p14:nvContentPartPr>
+            <p14:xfrm>
+              <a:off x="425450" y="6334125"/>
+              <a:ext cx="1704975" cy="25400"/>
+            </p14:xfrm>
+          </p:contentPart>
+        </mc:Choice>
+        <mc:Fallback xmlns="">
+          <p:pic>
+            <p:nvPicPr>
+              <p:cNvPr id="11" name="墨迹 10"/>
+            </p:nvPicPr>
+            <p:blipFill>
+              <a:blip r:embed="rId13"/>
+            </p:blipFill>
+            <p:spPr>
+              <a:xfrm>
+                <a:off x="425450" y="6334125"/>
+                <a:ext cx="1704975" cy="25400"/>
+              </a:xfrm>
+              <a:prstGeom prst="rect"/>
+            </p:spPr>
+          </p:pic>
+        </mc:Fallback>
+      </mc:AlternateContent>
+      <mc:AlternateContent xmlns:mc="http://schemas.openxmlformats.org/markup-compatibility/2006" xmlns:p14="http://schemas.microsoft.com/office/powerpoint/2010/main">
+        <mc:Choice Requires="p14">
+          <p:contentPart r:id="rId14" p14:bwMode="auto">
+            <p14:nvContentPartPr>
+              <p14:cNvPr id="12" name="墨迹 11"/>
+              <p14:cNvContentPartPr/>
+              <p14:nvPr/>
+            </p14:nvContentPartPr>
+            <p14:xfrm>
+              <a:off x="2625725" y="6251575"/>
+              <a:ext cx="409575" cy="22225"/>
+            </p14:xfrm>
+          </p:contentPart>
+        </mc:Choice>
+        <mc:Fallback xmlns="">
+          <p:pic>
+            <p:nvPicPr>
+              <p:cNvPr id="12" name="墨迹 11"/>
+            </p:nvPicPr>
+            <p:blipFill>
+              <a:blip r:embed="rId15"/>
+            </p:blipFill>
+            <p:spPr>
+              <a:xfrm>
+                <a:off x="2625725" y="6251575"/>
+                <a:ext cx="409575" cy="22225"/>
+              </a:xfrm>
+              <a:prstGeom prst="rect"/>
+            </p:spPr>
+          </p:pic>
+        </mc:Fallback>
+      </mc:AlternateContent>
+      <mc:AlternateContent xmlns:mc="http://schemas.openxmlformats.org/markup-compatibility/2006" xmlns:p14="http://schemas.microsoft.com/office/powerpoint/2010/main">
+        <mc:Choice Requires="p14">
+          <p:contentPart r:id="rId16" p14:bwMode="auto">
+            <p14:nvContentPartPr>
+              <p14:cNvPr id="13" name="墨迹 12"/>
+              <p14:cNvContentPartPr/>
+              <p14:nvPr/>
+            </p14:nvContentPartPr>
+            <p14:xfrm>
+              <a:off x="2619375" y="6213475"/>
+              <a:ext cx="165100" cy="155575"/>
+            </p14:xfrm>
+          </p:contentPart>
+        </mc:Choice>
+        <mc:Fallback xmlns="">
+          <p:pic>
+            <p:nvPicPr>
+              <p:cNvPr id="13" name="墨迹 12"/>
+            </p:nvPicPr>
+            <p:blipFill>
+              <a:blip r:embed="rId17"/>
+            </p:blipFill>
+            <p:spPr>
+              <a:xfrm>
+                <a:off x="2619375" y="6213475"/>
+                <a:ext cx="165100" cy="155575"/>
+              </a:xfrm>
+              <a:prstGeom prst="rect"/>
+            </p:spPr>
+          </p:pic>
+        </mc:Fallback>
+      </mc:AlternateContent>
+      <mc:AlternateContent xmlns:mc="http://schemas.openxmlformats.org/markup-compatibility/2006" xmlns:p14="http://schemas.microsoft.com/office/powerpoint/2010/main">
+        <mc:Choice Requires="p14">
+          <p:contentPart r:id="rId18" p14:bwMode="auto">
+            <p14:nvContentPartPr>
+              <p14:cNvPr id="14" name="墨迹 13"/>
+              <p14:cNvContentPartPr/>
+              <p14:nvPr/>
+            </p14:nvContentPartPr>
+            <p14:xfrm>
+              <a:off x="511175" y="6597650"/>
+              <a:ext cx="1679575" cy="31750"/>
+            </p14:xfrm>
+          </p:contentPart>
+        </mc:Choice>
+        <mc:Fallback xmlns="">
+          <p:pic>
+            <p:nvPicPr>
+              <p:cNvPr id="14" name="墨迹 13"/>
+            </p:nvPicPr>
+            <p:blipFill>
+              <a:blip r:embed="rId19"/>
+            </p:blipFill>
+            <p:spPr>
+              <a:xfrm>
+                <a:off x="511175" y="6597650"/>
+                <a:ext cx="1679575" cy="31750"/>
+              </a:xfrm>
+              <a:prstGeom prst="rect"/>
+            </p:spPr>
+          </p:pic>
+        </mc:Fallback>
+      </mc:AlternateContent>
+      <mc:AlternateContent xmlns:mc="http://schemas.openxmlformats.org/markup-compatibility/2006" xmlns:p14="http://schemas.microsoft.com/office/powerpoint/2010/main">
+        <mc:Choice Requires="p14">
+          <p:contentPart r:id="rId20" p14:bwMode="auto">
+            <p14:nvContentPartPr>
+              <p14:cNvPr id="15" name="墨迹 14"/>
+              <p14:cNvContentPartPr/>
+              <p14:nvPr/>
+            </p14:nvContentPartPr>
+            <p14:xfrm>
+              <a:off x="7550150" y="1441450"/>
+              <a:ext cx="1060450" cy="869950"/>
+            </p14:xfrm>
+          </p:contentPart>
+        </mc:Choice>
+        <mc:Fallback xmlns="">
+          <p:pic>
+            <p:nvPicPr>
+              <p:cNvPr id="15" name="墨迹 14"/>
+            </p:nvPicPr>
+            <p:blipFill>
+              <a:blip r:embed="rId21"/>
+            </p:blipFill>
+            <p:spPr>
+              <a:xfrm>
+                <a:off x="7550150" y="1441450"/>
+                <a:ext cx="1060450" cy="869950"/>
+              </a:xfrm>
+              <a:prstGeom prst="rect"/>
+            </p:spPr>
+          </p:pic>
+        </mc:Fallback>
+      </mc:AlternateContent>
+      <mc:AlternateContent xmlns:mc="http://schemas.openxmlformats.org/markup-compatibility/2006" xmlns:p14="http://schemas.microsoft.com/office/powerpoint/2010/main">
+        <mc:Choice Requires="p14">
+          <p:contentPart r:id="rId22" p14:bwMode="auto">
+            <p14:nvContentPartPr>
+              <p14:cNvPr id="16" name="墨迹 15"/>
+              <p14:cNvContentPartPr/>
+              <p14:nvPr/>
+            </p14:nvContentPartPr>
+            <p14:xfrm>
+              <a:off x="6286500" y="1733550"/>
+              <a:ext cx="403225" cy="22225"/>
+            </p14:xfrm>
+          </p:contentPart>
+        </mc:Choice>
+        <mc:Fallback xmlns="">
+          <p:pic>
+            <p:nvPicPr>
+              <p:cNvPr id="16" name="墨迹 15"/>
+            </p:nvPicPr>
+            <p:blipFill>
+              <a:blip r:embed="rId23"/>
+            </p:blipFill>
+            <p:spPr>
+              <a:xfrm>
+                <a:off x="6286500" y="1733550"/>
+                <a:ext cx="403225" cy="22225"/>
+              </a:xfrm>
+              <a:prstGeom prst="rect"/>
+            </p:spPr>
+          </p:pic>
+        </mc:Fallback>
+      </mc:AlternateContent>
+      <mc:AlternateContent xmlns:mc="http://schemas.openxmlformats.org/markup-compatibility/2006" xmlns:p14="http://schemas.microsoft.com/office/powerpoint/2010/main">
+        <mc:Choice Requires="p14">
+          <p:contentPart r:id="rId24" p14:bwMode="auto">
+            <p14:nvContentPartPr>
+              <p14:cNvPr id="17" name="墨迹 16"/>
+              <p14:cNvContentPartPr/>
+              <p14:nvPr/>
+            </p14:nvContentPartPr>
+            <p14:xfrm>
+              <a:off x="9620250" y="1476375"/>
+              <a:ext cx="622300" cy="360"/>
+            </p14:xfrm>
+          </p:contentPart>
+        </mc:Choice>
+        <mc:Fallback xmlns="">
+          <p:pic>
+            <p:nvPicPr>
+              <p:cNvPr id="17" name="墨迹 16"/>
+            </p:nvPicPr>
+            <p:blipFill>
+              <a:blip r:embed="rId25"/>
+            </p:blipFill>
+            <p:spPr>
+              <a:xfrm>
+                <a:off x="9620250" y="1476375"/>
+                <a:ext cx="622300" cy="360"/>
+              </a:xfrm>
+              <a:prstGeom prst="rect"/>
+            </p:spPr>
+          </p:pic>
+        </mc:Fallback>
+      </mc:AlternateContent>
     </p:spTree>
   </p:cSld>
   <p:clrMapOvr>
@@ -7058,6 +8792,70 @@
           </a:prstGeom>
         </p:spPr>
       </p:pic>
+      <mc:AlternateContent xmlns:mc="http://schemas.openxmlformats.org/markup-compatibility/2006" xmlns:p14="http://schemas.microsoft.com/office/powerpoint/2010/main">
+        <mc:Choice Requires="p14">
+          <p:contentPart r:id="rId3" p14:bwMode="auto">
+            <p14:nvContentPartPr>
+              <p14:cNvPr id="8" name="墨迹 7"/>
+              <p14:cNvContentPartPr/>
+              <p14:nvPr/>
+            </p14:nvContentPartPr>
+            <p14:xfrm>
+              <a:off x="3492500" y="701675"/>
+              <a:ext cx="1562100" cy="463550"/>
+            </p14:xfrm>
+          </p:contentPart>
+        </mc:Choice>
+        <mc:Fallback xmlns="">
+          <p:pic>
+            <p:nvPicPr>
+              <p:cNvPr id="8" name="墨迹 7"/>
+            </p:nvPicPr>
+            <p:blipFill>
+              <a:blip r:embed="rId4"/>
+            </p:blipFill>
+            <p:spPr>
+              <a:xfrm>
+                <a:off x="3492500" y="701675"/>
+                <a:ext cx="1562100" cy="463550"/>
+              </a:xfrm>
+              <a:prstGeom prst="rect"/>
+            </p:spPr>
+          </p:pic>
+        </mc:Fallback>
+      </mc:AlternateContent>
+      <mc:AlternateContent xmlns:mc="http://schemas.openxmlformats.org/markup-compatibility/2006" xmlns:p14="http://schemas.microsoft.com/office/powerpoint/2010/main">
+        <mc:Choice Requires="p14">
+          <p:contentPart r:id="rId5" p14:bwMode="auto">
+            <p14:nvContentPartPr>
+              <p14:cNvPr id="10" name="墨迹 9"/>
+              <p14:cNvContentPartPr/>
+              <p14:nvPr/>
+            </p14:nvContentPartPr>
+            <p14:xfrm>
+              <a:off x="3606800" y="1362075"/>
+              <a:ext cx="1879600" cy="1558925"/>
+            </p14:xfrm>
+          </p:contentPart>
+        </mc:Choice>
+        <mc:Fallback xmlns="">
+          <p:pic>
+            <p:nvPicPr>
+              <p:cNvPr id="10" name="墨迹 9"/>
+            </p:nvPicPr>
+            <p:blipFill>
+              <a:blip r:embed="rId6"/>
+            </p:blipFill>
+            <p:spPr>
+              <a:xfrm>
+                <a:off x="3606800" y="1362075"/>
+                <a:ext cx="1879600" cy="1558925"/>
+              </a:xfrm>
+              <a:prstGeom prst="rect"/>
+            </p:spPr>
+          </p:pic>
+        </mc:Fallback>
+      </mc:AlternateContent>
     </p:spTree>
   </p:cSld>
   <p:clrMapOvr>
@@ -8230,6 +10028,614 @@
           </a:prstGeom>
         </p:spPr>
       </p:pic>
+      <mc:AlternateContent xmlns:mc="http://schemas.openxmlformats.org/markup-compatibility/2006" xmlns:p14="http://schemas.microsoft.com/office/powerpoint/2010/main">
+        <mc:Choice Requires="p14">
+          <p:contentPart r:id="rId4" p14:bwMode="auto">
+            <p14:nvContentPartPr>
+              <p14:cNvPr id="5" name="墨迹 4"/>
+              <p14:cNvContentPartPr/>
+              <p14:nvPr/>
+            </p14:nvContentPartPr>
+            <p14:xfrm>
+              <a:off x="882650" y="5473700"/>
+              <a:ext cx="3067050" cy="44450"/>
+            </p14:xfrm>
+          </p:contentPart>
+        </mc:Choice>
+        <mc:Fallback xmlns="">
+          <p:pic>
+            <p:nvPicPr>
+              <p:cNvPr id="5" name="墨迹 4"/>
+            </p:nvPicPr>
+            <p:blipFill>
+              <a:blip r:embed="rId5"/>
+            </p:blipFill>
+            <p:spPr>
+              <a:xfrm>
+                <a:off x="882650" y="5473700"/>
+                <a:ext cx="3067050" cy="44450"/>
+              </a:xfrm>
+              <a:prstGeom prst="rect"/>
+            </p:spPr>
+          </p:pic>
+        </mc:Fallback>
+      </mc:AlternateContent>
+      <mc:AlternateContent xmlns:mc="http://schemas.openxmlformats.org/markup-compatibility/2006" xmlns:p14="http://schemas.microsoft.com/office/powerpoint/2010/main">
+        <mc:Choice Requires="p14">
+          <p:contentPart r:id="rId6" p14:bwMode="auto">
+            <p14:nvContentPartPr>
+              <p14:cNvPr id="6" name="墨迹 5"/>
+              <p14:cNvContentPartPr/>
+              <p14:nvPr/>
+            </p14:nvContentPartPr>
+            <p14:xfrm>
+              <a:off x="4375150" y="5467350"/>
+              <a:ext cx="911225" cy="360"/>
+            </p14:xfrm>
+          </p:contentPart>
+        </mc:Choice>
+        <mc:Fallback xmlns="">
+          <p:pic>
+            <p:nvPicPr>
+              <p:cNvPr id="6" name="墨迹 5"/>
+            </p:nvPicPr>
+            <p:blipFill>
+              <a:blip r:embed="rId7"/>
+            </p:blipFill>
+            <p:spPr>
+              <a:xfrm>
+                <a:off x="4375150" y="5467350"/>
+                <a:ext cx="911225" cy="360"/>
+              </a:xfrm>
+              <a:prstGeom prst="rect"/>
+            </p:spPr>
+          </p:pic>
+        </mc:Fallback>
+      </mc:AlternateContent>
+      <mc:AlternateContent xmlns:mc="http://schemas.openxmlformats.org/markup-compatibility/2006" xmlns:p14="http://schemas.microsoft.com/office/powerpoint/2010/main">
+        <mc:Choice Requires="p14">
+          <p:contentPart r:id="rId8" p14:bwMode="auto">
+            <p14:nvContentPartPr>
+              <p14:cNvPr id="8" name="墨迹 7"/>
+              <p14:cNvContentPartPr/>
+              <p14:nvPr/>
+            </p14:nvContentPartPr>
+            <p14:xfrm>
+              <a:off x="2632075" y="5060950"/>
+              <a:ext cx="1069975" cy="415925"/>
+            </p14:xfrm>
+          </p:contentPart>
+        </mc:Choice>
+        <mc:Fallback xmlns="">
+          <p:pic>
+            <p:nvPicPr>
+              <p:cNvPr id="8" name="墨迹 7"/>
+            </p:nvPicPr>
+            <p:blipFill>
+              <a:blip r:embed="rId9"/>
+            </p:blipFill>
+            <p:spPr>
+              <a:xfrm>
+                <a:off x="2632075" y="5060950"/>
+                <a:ext cx="1069975" cy="415925"/>
+              </a:xfrm>
+              <a:prstGeom prst="rect"/>
+            </p:spPr>
+          </p:pic>
+        </mc:Fallback>
+      </mc:AlternateContent>
+      <mc:AlternateContent xmlns:mc="http://schemas.openxmlformats.org/markup-compatibility/2006" xmlns:p14="http://schemas.microsoft.com/office/powerpoint/2010/main">
+        <mc:Choice Requires="p14">
+          <p:contentPart r:id="rId10" p14:bwMode="auto">
+            <p14:nvContentPartPr>
+              <p14:cNvPr id="9" name="墨迹 8"/>
+              <p14:cNvContentPartPr/>
+              <p14:nvPr/>
+            </p14:nvContentPartPr>
+            <p14:xfrm>
+              <a:off x="704850" y="3867150"/>
+              <a:ext cx="396875" cy="333375"/>
+            </p14:xfrm>
+          </p:contentPart>
+        </mc:Choice>
+        <mc:Fallback xmlns="">
+          <p:pic>
+            <p:nvPicPr>
+              <p:cNvPr id="9" name="墨迹 8"/>
+            </p:nvPicPr>
+            <p:blipFill>
+              <a:blip r:embed="rId11"/>
+            </p:blipFill>
+            <p:spPr>
+              <a:xfrm>
+                <a:off x="704850" y="3867150"/>
+                <a:ext cx="396875" cy="333375"/>
+              </a:xfrm>
+              <a:prstGeom prst="rect"/>
+            </p:spPr>
+          </p:pic>
+        </mc:Fallback>
+      </mc:AlternateContent>
+      <mc:AlternateContent xmlns:mc="http://schemas.openxmlformats.org/markup-compatibility/2006" xmlns:p14="http://schemas.microsoft.com/office/powerpoint/2010/main">
+        <mc:Choice Requires="p14">
+          <p:contentPart r:id="rId12" p14:bwMode="auto">
+            <p14:nvContentPartPr>
+              <p14:cNvPr id="10" name="墨迹 9"/>
+              <p14:cNvContentPartPr/>
+              <p14:nvPr/>
+            </p14:nvContentPartPr>
+            <p14:xfrm>
+              <a:off x="1006475" y="4025900"/>
+              <a:ext cx="327025" cy="974725"/>
+            </p14:xfrm>
+          </p:contentPart>
+        </mc:Choice>
+        <mc:Fallback xmlns="">
+          <p:pic>
+            <p:nvPicPr>
+              <p:cNvPr id="10" name="墨迹 9"/>
+            </p:nvPicPr>
+            <p:blipFill>
+              <a:blip r:embed="rId13"/>
+            </p:blipFill>
+            <p:spPr>
+              <a:xfrm>
+                <a:off x="1006475" y="4025900"/>
+                <a:ext cx="327025" cy="974725"/>
+              </a:xfrm>
+              <a:prstGeom prst="rect"/>
+            </p:spPr>
+          </p:pic>
+        </mc:Fallback>
+      </mc:AlternateContent>
+      <mc:AlternateContent xmlns:mc="http://schemas.openxmlformats.org/markup-compatibility/2006" xmlns:p14="http://schemas.microsoft.com/office/powerpoint/2010/main">
+        <mc:Choice Requires="p14">
+          <p:contentPart r:id="rId14" p14:bwMode="auto">
+            <p14:nvContentPartPr>
+              <p14:cNvPr id="11" name="墨迹 10"/>
+              <p14:cNvContentPartPr/>
+              <p14:nvPr/>
+            </p14:nvContentPartPr>
+            <p14:xfrm>
+              <a:off x="1231900" y="4835525"/>
+              <a:ext cx="228600" cy="190500"/>
+            </p14:xfrm>
+          </p:contentPart>
+        </mc:Choice>
+        <mc:Fallback xmlns="">
+          <p:pic>
+            <p:nvPicPr>
+              <p:cNvPr id="11" name="墨迹 10"/>
+            </p:nvPicPr>
+            <p:blipFill>
+              <a:blip r:embed="rId15"/>
+            </p:blipFill>
+            <p:spPr>
+              <a:xfrm>
+                <a:off x="1231900" y="4835525"/>
+                <a:ext cx="228600" cy="190500"/>
+              </a:xfrm>
+              <a:prstGeom prst="rect"/>
+            </p:spPr>
+          </p:pic>
+        </mc:Fallback>
+      </mc:AlternateContent>
+      <mc:AlternateContent xmlns:mc="http://schemas.openxmlformats.org/markup-compatibility/2006" xmlns:p14="http://schemas.microsoft.com/office/powerpoint/2010/main">
+        <mc:Choice Requires="p14">
+          <p:contentPart r:id="rId16" p14:bwMode="auto">
+            <p14:nvContentPartPr>
+              <p14:cNvPr id="12" name="墨迹 11"/>
+              <p14:cNvContentPartPr/>
+              <p14:nvPr/>
+            </p14:nvContentPartPr>
+            <p14:xfrm>
+              <a:off x="1235075" y="5197475"/>
+              <a:ext cx="831850" cy="330200"/>
+            </p14:xfrm>
+          </p:contentPart>
+        </mc:Choice>
+        <mc:Fallback xmlns="">
+          <p:pic>
+            <p:nvPicPr>
+              <p:cNvPr id="12" name="墨迹 11"/>
+            </p:nvPicPr>
+            <p:blipFill>
+              <a:blip r:embed="rId17"/>
+            </p:blipFill>
+            <p:spPr>
+              <a:xfrm>
+                <a:off x="1235075" y="5197475"/>
+                <a:ext cx="831850" cy="330200"/>
+              </a:xfrm>
+              <a:prstGeom prst="rect"/>
+            </p:spPr>
+          </p:pic>
+        </mc:Fallback>
+      </mc:AlternateContent>
+      <mc:AlternateContent xmlns:mc="http://schemas.openxmlformats.org/markup-compatibility/2006" xmlns:p14="http://schemas.microsoft.com/office/powerpoint/2010/main">
+        <mc:Choice Requires="p14">
+          <p:contentPart r:id="rId18" p14:bwMode="auto">
+            <p14:nvContentPartPr>
+              <p14:cNvPr id="13" name="墨迹 12"/>
+              <p14:cNvContentPartPr/>
+              <p14:nvPr/>
+            </p14:nvContentPartPr>
+            <p14:xfrm>
+              <a:off x="2911475" y="5175250"/>
+              <a:ext cx="1276350" cy="104775"/>
+            </p14:xfrm>
+          </p:contentPart>
+        </mc:Choice>
+        <mc:Fallback xmlns="">
+          <p:pic>
+            <p:nvPicPr>
+              <p:cNvPr id="13" name="墨迹 12"/>
+            </p:nvPicPr>
+            <p:blipFill>
+              <a:blip r:embed="rId19"/>
+            </p:blipFill>
+            <p:spPr>
+              <a:xfrm>
+                <a:off x="2911475" y="5175250"/>
+                <a:ext cx="1276350" cy="104775"/>
+              </a:xfrm>
+              <a:prstGeom prst="rect"/>
+            </p:spPr>
+          </p:pic>
+        </mc:Fallback>
+      </mc:AlternateContent>
+      <mc:AlternateContent xmlns:mc="http://schemas.openxmlformats.org/markup-compatibility/2006" xmlns:p14="http://schemas.microsoft.com/office/powerpoint/2010/main">
+        <mc:Choice Requires="p14">
+          <p:contentPart r:id="rId20" p14:bwMode="auto">
+            <p14:nvContentPartPr>
+              <p14:cNvPr id="14" name="墨迹 13"/>
+              <p14:cNvContentPartPr/>
+              <p14:nvPr/>
+            </p14:nvContentPartPr>
+            <p14:xfrm>
+              <a:off x="4133850" y="5229225"/>
+              <a:ext cx="200025" cy="133350"/>
+            </p14:xfrm>
+          </p:contentPart>
+        </mc:Choice>
+        <mc:Fallback xmlns="">
+          <p:pic>
+            <p:nvPicPr>
+              <p:cNvPr id="14" name="墨迹 13"/>
+            </p:nvPicPr>
+            <p:blipFill>
+              <a:blip r:embed="rId21"/>
+            </p:blipFill>
+            <p:spPr>
+              <a:xfrm>
+                <a:off x="4133850" y="5229225"/>
+                <a:ext cx="200025" cy="133350"/>
+              </a:xfrm>
+              <a:prstGeom prst="rect"/>
+            </p:spPr>
+          </p:pic>
+        </mc:Fallback>
+      </mc:AlternateContent>
+      <mc:AlternateContent xmlns:mc="http://schemas.openxmlformats.org/markup-compatibility/2006" xmlns:p14="http://schemas.microsoft.com/office/powerpoint/2010/main">
+        <mc:Choice Requires="p14">
+          <p:contentPart r:id="rId22" p14:bwMode="auto">
+            <p14:nvContentPartPr>
+              <p14:cNvPr id="15" name="墨迹 14"/>
+              <p14:cNvContentPartPr/>
+              <p14:nvPr/>
+            </p14:nvContentPartPr>
+            <p14:xfrm>
+              <a:off x="4359275" y="5184775"/>
+              <a:ext cx="669925" cy="365125"/>
+            </p14:xfrm>
+          </p:contentPart>
+        </mc:Choice>
+        <mc:Fallback xmlns="">
+          <p:pic>
+            <p:nvPicPr>
+              <p:cNvPr id="15" name="墨迹 14"/>
+            </p:nvPicPr>
+            <p:blipFill>
+              <a:blip r:embed="rId23"/>
+            </p:blipFill>
+            <p:spPr>
+              <a:xfrm>
+                <a:off x="4359275" y="5184775"/>
+                <a:ext cx="669925" cy="365125"/>
+              </a:xfrm>
+              <a:prstGeom prst="rect"/>
+            </p:spPr>
+          </p:pic>
+        </mc:Fallback>
+      </mc:AlternateContent>
+      <mc:AlternateContent xmlns:mc="http://schemas.openxmlformats.org/markup-compatibility/2006" xmlns:p14="http://schemas.microsoft.com/office/powerpoint/2010/main">
+        <mc:Choice Requires="p14">
+          <p:contentPart r:id="rId24" p14:bwMode="auto">
+            <p14:nvContentPartPr>
+              <p14:cNvPr id="16" name="墨迹 15"/>
+              <p14:cNvContentPartPr/>
+              <p14:nvPr/>
+            </p14:nvContentPartPr>
+            <p14:xfrm>
+              <a:off x="4733925" y="5133975"/>
+              <a:ext cx="517525" cy="149225"/>
+            </p14:xfrm>
+          </p:contentPart>
+        </mc:Choice>
+        <mc:Fallback xmlns="">
+          <p:pic>
+            <p:nvPicPr>
+              <p:cNvPr id="16" name="墨迹 15"/>
+            </p:nvPicPr>
+            <p:blipFill>
+              <a:blip r:embed="rId25"/>
+            </p:blipFill>
+            <p:spPr>
+              <a:xfrm>
+                <a:off x="4733925" y="5133975"/>
+                <a:ext cx="517525" cy="149225"/>
+              </a:xfrm>
+              <a:prstGeom prst="rect"/>
+            </p:spPr>
+          </p:pic>
+        </mc:Fallback>
+      </mc:AlternateContent>
+      <mc:AlternateContent xmlns:mc="http://schemas.openxmlformats.org/markup-compatibility/2006" xmlns:p14="http://schemas.microsoft.com/office/powerpoint/2010/main">
+        <mc:Choice Requires="p14">
+          <p:contentPart r:id="rId26" p14:bwMode="auto">
+            <p14:nvContentPartPr>
+              <p14:cNvPr id="17" name="墨迹 16"/>
+              <p14:cNvContentPartPr/>
+              <p14:nvPr/>
+            </p14:nvContentPartPr>
+            <p14:xfrm>
+              <a:off x="5102225" y="5222875"/>
+              <a:ext cx="171450" cy="82550"/>
+            </p14:xfrm>
+          </p:contentPart>
+        </mc:Choice>
+        <mc:Fallback xmlns="">
+          <p:pic>
+            <p:nvPicPr>
+              <p:cNvPr id="17" name="墨迹 16"/>
+            </p:nvPicPr>
+            <p:blipFill>
+              <a:blip r:embed="rId27"/>
+            </p:blipFill>
+            <p:spPr>
+              <a:xfrm>
+                <a:off x="5102225" y="5222875"/>
+                <a:ext cx="171450" cy="82550"/>
+              </a:xfrm>
+              <a:prstGeom prst="rect"/>
+            </p:spPr>
+          </p:pic>
+        </mc:Fallback>
+      </mc:AlternateContent>
+      <mc:AlternateContent xmlns:mc="http://schemas.openxmlformats.org/markup-compatibility/2006" xmlns:p14="http://schemas.microsoft.com/office/powerpoint/2010/main">
+        <mc:Choice Requires="p14">
+          <p:contentPart r:id="rId28" p14:bwMode="auto">
+            <p14:nvContentPartPr>
+              <p14:cNvPr id="18" name="墨迹 17"/>
+              <p14:cNvContentPartPr/>
+              <p14:nvPr/>
+            </p14:nvContentPartPr>
+            <p14:xfrm>
+              <a:off x="5226050" y="5102225"/>
+              <a:ext cx="711200" cy="406400"/>
+            </p14:xfrm>
+          </p:contentPart>
+        </mc:Choice>
+        <mc:Fallback xmlns="">
+          <p:pic>
+            <p:nvPicPr>
+              <p:cNvPr id="18" name="墨迹 17"/>
+            </p:nvPicPr>
+            <p:blipFill>
+              <a:blip r:embed="rId29"/>
+            </p:blipFill>
+            <p:spPr>
+              <a:xfrm>
+                <a:off x="5226050" y="5102225"/>
+                <a:ext cx="711200" cy="406400"/>
+              </a:xfrm>
+              <a:prstGeom prst="rect"/>
+            </p:spPr>
+          </p:pic>
+        </mc:Fallback>
+      </mc:AlternateContent>
+      <mc:AlternateContent xmlns:mc="http://schemas.openxmlformats.org/markup-compatibility/2006" xmlns:p14="http://schemas.microsoft.com/office/powerpoint/2010/main">
+        <mc:Choice Requires="p14">
+          <p:contentPart r:id="rId30" p14:bwMode="auto">
+            <p14:nvContentPartPr>
+              <p14:cNvPr id="19" name="墨迹 18"/>
+              <p14:cNvContentPartPr/>
+              <p14:nvPr/>
+            </p14:nvContentPartPr>
+            <p14:xfrm>
+              <a:off x="5803900" y="5105400"/>
+              <a:ext cx="473075" cy="69850"/>
+            </p14:xfrm>
+          </p:contentPart>
+        </mc:Choice>
+        <mc:Fallback xmlns="">
+          <p:pic>
+            <p:nvPicPr>
+              <p:cNvPr id="19" name="墨迹 18"/>
+            </p:nvPicPr>
+            <p:blipFill>
+              <a:blip r:embed="rId31"/>
+            </p:blipFill>
+            <p:spPr>
+              <a:xfrm>
+                <a:off x="5803900" y="5105400"/>
+                <a:ext cx="473075" cy="69850"/>
+              </a:xfrm>
+              <a:prstGeom prst="rect"/>
+            </p:spPr>
+          </p:pic>
+        </mc:Fallback>
+      </mc:AlternateContent>
+      <mc:AlternateContent xmlns:mc="http://schemas.openxmlformats.org/markup-compatibility/2006" xmlns:p14="http://schemas.microsoft.com/office/powerpoint/2010/main">
+        <mc:Choice Requires="p14">
+          <p:contentPart r:id="rId32" p14:bwMode="auto">
+            <p14:nvContentPartPr>
+              <p14:cNvPr id="20" name="墨迹 19"/>
+              <p14:cNvContentPartPr/>
+              <p14:nvPr/>
+            </p14:nvContentPartPr>
+            <p14:xfrm>
+              <a:off x="6121400" y="5124450"/>
+              <a:ext cx="180975" cy="60325"/>
+            </p14:xfrm>
+          </p:contentPart>
+        </mc:Choice>
+        <mc:Fallback xmlns="">
+          <p:pic>
+            <p:nvPicPr>
+              <p:cNvPr id="20" name="墨迹 19"/>
+            </p:nvPicPr>
+            <p:blipFill>
+              <a:blip r:embed="rId33"/>
+            </p:blipFill>
+            <p:spPr>
+              <a:xfrm>
+                <a:off x="6121400" y="5124450"/>
+                <a:ext cx="180975" cy="60325"/>
+              </a:xfrm>
+              <a:prstGeom prst="rect"/>
+            </p:spPr>
+          </p:pic>
+        </mc:Fallback>
+      </mc:AlternateContent>
+      <mc:AlternateContent xmlns:mc="http://schemas.openxmlformats.org/markup-compatibility/2006" xmlns:p14="http://schemas.microsoft.com/office/powerpoint/2010/main">
+        <mc:Choice Requires="p14">
+          <p:contentPart r:id="rId34" p14:bwMode="auto">
+            <p14:nvContentPartPr>
+              <p14:cNvPr id="21" name="墨迹 20"/>
+              <p14:cNvContentPartPr/>
+              <p14:nvPr/>
+            </p14:nvContentPartPr>
+            <p14:xfrm>
+              <a:off x="4692650" y="2301875"/>
+              <a:ext cx="882650" cy="2282825"/>
+            </p14:xfrm>
+          </p:contentPart>
+        </mc:Choice>
+        <mc:Fallback xmlns="">
+          <p:pic>
+            <p:nvPicPr>
+              <p:cNvPr id="21" name="墨迹 20"/>
+            </p:nvPicPr>
+            <p:blipFill>
+              <a:blip r:embed="rId35"/>
+            </p:blipFill>
+            <p:spPr>
+              <a:xfrm>
+                <a:off x="4692650" y="2301875"/>
+                <a:ext cx="882650" cy="2282825"/>
+              </a:xfrm>
+              <a:prstGeom prst="rect"/>
+            </p:spPr>
+          </p:pic>
+        </mc:Fallback>
+      </mc:AlternateContent>
+      <mc:AlternateContent xmlns:mc="http://schemas.openxmlformats.org/markup-compatibility/2006" xmlns:p14="http://schemas.microsoft.com/office/powerpoint/2010/main">
+        <mc:Choice Requires="p14">
+          <p:contentPart r:id="rId36" p14:bwMode="auto">
+            <p14:nvContentPartPr>
+              <p14:cNvPr id="22" name="墨迹 21"/>
+              <p14:cNvContentPartPr/>
+              <p14:nvPr/>
+            </p14:nvContentPartPr>
+            <p14:xfrm>
+              <a:off x="4959350" y="1641475"/>
+              <a:ext cx="371475" cy="2495550"/>
+            </p14:xfrm>
+          </p:contentPart>
+        </mc:Choice>
+        <mc:Fallback xmlns="">
+          <p:pic>
+            <p:nvPicPr>
+              <p:cNvPr id="22" name="墨迹 21"/>
+            </p:nvPicPr>
+            <p:blipFill>
+              <a:blip r:embed="rId37"/>
+            </p:blipFill>
+            <p:spPr>
+              <a:xfrm>
+                <a:off x="4959350" y="1641475"/>
+                <a:ext cx="371475" cy="2495550"/>
+              </a:xfrm>
+              <a:prstGeom prst="rect"/>
+            </p:spPr>
+          </p:pic>
+        </mc:Fallback>
+      </mc:AlternateContent>
+      <mc:AlternateContent xmlns:mc="http://schemas.openxmlformats.org/markup-compatibility/2006" xmlns:p14="http://schemas.microsoft.com/office/powerpoint/2010/main">
+        <mc:Choice Requires="p14">
+          <p:contentPart r:id="rId38" p14:bwMode="auto">
+            <p14:nvContentPartPr>
+              <p14:cNvPr id="23" name="墨迹 22"/>
+              <p14:cNvContentPartPr/>
+              <p14:nvPr/>
+            </p14:nvContentPartPr>
+            <p14:xfrm>
+              <a:off x="7162800" y="1397000"/>
+              <a:ext cx="939800" cy="3086100"/>
+            </p14:xfrm>
+          </p:contentPart>
+        </mc:Choice>
+        <mc:Fallback xmlns="">
+          <p:pic>
+            <p:nvPicPr>
+              <p:cNvPr id="23" name="墨迹 22"/>
+            </p:nvPicPr>
+            <p:blipFill>
+              <a:blip r:embed="rId39"/>
+            </p:blipFill>
+            <p:spPr>
+              <a:xfrm>
+                <a:off x="7162800" y="1397000"/>
+                <a:ext cx="939800" cy="3086100"/>
+              </a:xfrm>
+              <a:prstGeom prst="rect"/>
+            </p:spPr>
+          </p:pic>
+        </mc:Fallback>
+      </mc:AlternateContent>
+      <mc:AlternateContent xmlns:mc="http://schemas.openxmlformats.org/markup-compatibility/2006" xmlns:p14="http://schemas.microsoft.com/office/powerpoint/2010/main">
+        <mc:Choice Requires="p14">
+          <p:contentPart r:id="rId40" p14:bwMode="auto">
+            <p14:nvContentPartPr>
+              <p14:cNvPr id="24" name="墨迹 23"/>
+              <p14:cNvContentPartPr/>
+              <p14:nvPr/>
+            </p14:nvContentPartPr>
+            <p14:xfrm>
+              <a:off x="8607425" y="1473200"/>
+              <a:ext cx="596900" cy="2816225"/>
+            </p14:xfrm>
+          </p:contentPart>
+        </mc:Choice>
+        <mc:Fallback xmlns="">
+          <p:pic>
+            <p:nvPicPr>
+              <p:cNvPr id="24" name="墨迹 23"/>
+            </p:nvPicPr>
+            <p:blipFill>
+              <a:blip r:embed="rId41"/>
+            </p:blipFill>
+            <p:spPr>
+              <a:xfrm>
+                <a:off x="8607425" y="1473200"/>
+                <a:ext cx="596900" cy="2816225"/>
+              </a:xfrm>
+              <a:prstGeom prst="rect"/>
+            </p:spPr>
+          </p:pic>
+        </mc:Fallback>
+      </mc:AlternateContent>
     </p:spTree>
   </p:cSld>
   <p:clrMapOvr>
@@ -10240,7 +12646,45 @@
                 <a:ea typeface="微软雅黑" charset="0"/>
                 <a:sym typeface="+mn-ea"/>
               </a:rPr>
-              <a:t>，以你喜欢的方式运行，是正确且成功的。</a:t>
+              <a:t>，</a:t>
+            </a:r>
+            <a:br>
+              <a:rPr lang="zh-CN" altLang="en-US" dirty="0">
+                <a:solidFill>
+                  <a:schemeClr val="bg1">
+                    <a:lumMod val="50000"/>
+                  </a:schemeClr>
+                </a:solidFill>
+                <a:latin typeface="微软雅黑" charset="0"/>
+                <a:ea typeface="微软雅黑" charset="0"/>
+                <a:sym typeface="+mn-ea"/>
+              </a:rPr>
+            </a:br>
+            <a:r>
+              <a:rPr lang="zh-CN" altLang="en-US" dirty="0">
+                <a:solidFill>
+                  <a:schemeClr val="bg1">
+                    <a:lumMod val="50000"/>
+                  </a:schemeClr>
+                </a:solidFill>
+                <a:latin typeface="微软雅黑" charset="0"/>
+                <a:ea typeface="微软雅黑" charset="0"/>
+                <a:sym typeface="+mn-ea"/>
+              </a:rPr>
+              <a:t>找到自己喜欢的方式去编排，或许</a:t>
+            </a:r>
+            <a:r>
+              <a:rPr lang="zh-CN" altLang="en-US" dirty="0">
+                <a:solidFill>
+                  <a:schemeClr val="bg1">
+                    <a:lumMod val="50000"/>
+                  </a:schemeClr>
+                </a:solidFill>
+                <a:latin typeface="微软雅黑" charset="0"/>
+                <a:ea typeface="微软雅黑" charset="0"/>
+                <a:sym typeface="+mn-ea"/>
+              </a:rPr>
+              <a:t>是正确且成功的。</a:t>
             </a:r>
             <a:endParaRPr lang="zh-CN" altLang="en-US" dirty="0">
               <a:solidFill>
@@ -15048,6 +17492,550 @@
           </a:p>
         </p:txBody>
       </p:sp>
+      <mc:AlternateContent xmlns:mc="http://schemas.openxmlformats.org/markup-compatibility/2006" xmlns:p14="http://schemas.microsoft.com/office/powerpoint/2010/main">
+        <mc:Choice Requires="p14">
+          <p:contentPart r:id="rId1" p14:bwMode="auto">
+            <p14:nvContentPartPr>
+              <p14:cNvPr id="2" name="墨迹 1"/>
+              <p14:cNvContentPartPr/>
+              <p14:nvPr/>
+            </p14:nvContentPartPr>
+            <p14:xfrm>
+              <a:off x="425450" y="2632075"/>
+              <a:ext cx="2051050" cy="1231900"/>
+            </p14:xfrm>
+          </p:contentPart>
+        </mc:Choice>
+        <mc:Fallback xmlns="">
+          <p:pic>
+            <p:nvPicPr>
+              <p:cNvPr id="2" name="墨迹 1"/>
+            </p:nvPicPr>
+            <p:blipFill>
+              <a:blip r:embed="rId2"/>
+            </p:blipFill>
+            <p:spPr>
+              <a:xfrm>
+                <a:off x="425450" y="2632075"/>
+                <a:ext cx="2051050" cy="1231900"/>
+              </a:xfrm>
+              <a:prstGeom prst="rect"/>
+            </p:spPr>
+          </p:pic>
+        </mc:Fallback>
+      </mc:AlternateContent>
+      <mc:AlternateContent xmlns:mc="http://schemas.openxmlformats.org/markup-compatibility/2006" xmlns:p14="http://schemas.microsoft.com/office/powerpoint/2010/main">
+        <mc:Choice Requires="p14">
+          <p:contentPart r:id="rId3" p14:bwMode="auto">
+            <p14:nvContentPartPr>
+              <p14:cNvPr id="5" name="墨迹 4"/>
+              <p14:cNvContentPartPr/>
+              <p14:nvPr/>
+            </p14:nvContentPartPr>
+            <p14:xfrm>
+              <a:off x="800100" y="4108450"/>
+              <a:ext cx="2197100" cy="530225"/>
+            </p14:xfrm>
+          </p:contentPart>
+        </mc:Choice>
+        <mc:Fallback xmlns="">
+          <p:pic>
+            <p:nvPicPr>
+              <p:cNvPr id="5" name="墨迹 4"/>
+            </p:nvPicPr>
+            <p:blipFill>
+              <a:blip r:embed="rId4"/>
+            </p:blipFill>
+            <p:spPr>
+              <a:xfrm>
+                <a:off x="800100" y="4108450"/>
+                <a:ext cx="2197100" cy="530225"/>
+              </a:xfrm>
+              <a:prstGeom prst="rect"/>
+            </p:spPr>
+          </p:pic>
+        </mc:Fallback>
+      </mc:AlternateContent>
+      <mc:AlternateContent xmlns:mc="http://schemas.openxmlformats.org/markup-compatibility/2006" xmlns:p14="http://schemas.microsoft.com/office/powerpoint/2010/main">
+        <mc:Choice Requires="p14">
+          <p:contentPart r:id="rId5" p14:bwMode="auto">
+            <p14:nvContentPartPr>
+              <p14:cNvPr id="6" name="墨迹 5"/>
+              <p14:cNvContentPartPr/>
+              <p14:nvPr/>
+            </p14:nvContentPartPr>
+            <p14:xfrm>
+              <a:off x="1117600" y="4200525"/>
+              <a:ext cx="1162050" cy="682625"/>
+            </p14:xfrm>
+          </p:contentPart>
+        </mc:Choice>
+        <mc:Fallback xmlns="">
+          <p:pic>
+            <p:nvPicPr>
+              <p:cNvPr id="6" name="墨迹 5"/>
+            </p:nvPicPr>
+            <p:blipFill>
+              <a:blip r:embed="rId6"/>
+            </p:blipFill>
+            <p:spPr>
+              <a:xfrm>
+                <a:off x="1117600" y="4200525"/>
+                <a:ext cx="1162050" cy="682625"/>
+              </a:xfrm>
+              <a:prstGeom prst="rect"/>
+            </p:spPr>
+          </p:pic>
+        </mc:Fallback>
+      </mc:AlternateContent>
+      <mc:AlternateContent xmlns:mc="http://schemas.openxmlformats.org/markup-compatibility/2006" xmlns:p14="http://schemas.microsoft.com/office/powerpoint/2010/main">
+        <mc:Choice Requires="p14">
+          <p:contentPart r:id="rId7" p14:bwMode="auto">
+            <p14:nvContentPartPr>
+              <p14:cNvPr id="7" name="墨迹 6"/>
+              <p14:cNvContentPartPr/>
+              <p14:nvPr/>
+            </p14:nvContentPartPr>
+            <p14:xfrm>
+              <a:off x="3810000" y="6286500"/>
+              <a:ext cx="2016125" cy="38100"/>
+            </p14:xfrm>
+          </p:contentPart>
+        </mc:Choice>
+        <mc:Fallback xmlns="">
+          <p:pic>
+            <p:nvPicPr>
+              <p:cNvPr id="7" name="墨迹 6"/>
+            </p:nvPicPr>
+            <p:blipFill>
+              <a:blip r:embed="rId8"/>
+            </p:blipFill>
+            <p:spPr>
+              <a:xfrm>
+                <a:off x="3810000" y="6286500"/>
+                <a:ext cx="2016125" cy="38100"/>
+              </a:xfrm>
+              <a:prstGeom prst="rect"/>
+            </p:spPr>
+          </p:pic>
+        </mc:Fallback>
+      </mc:AlternateContent>
+      <mc:AlternateContent xmlns:mc="http://schemas.openxmlformats.org/markup-compatibility/2006" xmlns:p14="http://schemas.microsoft.com/office/powerpoint/2010/main">
+        <mc:Choice Requires="p14">
+          <p:contentPart r:id="rId9" p14:bwMode="auto">
+            <p14:nvContentPartPr>
+              <p14:cNvPr id="8" name="墨迹 7"/>
+              <p14:cNvContentPartPr/>
+              <p14:nvPr/>
+            </p14:nvContentPartPr>
+            <p14:xfrm>
+              <a:off x="5870575" y="6276975"/>
+              <a:ext cx="1025525" cy="12700"/>
+            </p14:xfrm>
+          </p:contentPart>
+        </mc:Choice>
+        <mc:Fallback xmlns="">
+          <p:pic>
+            <p:nvPicPr>
+              <p:cNvPr id="8" name="墨迹 7"/>
+            </p:nvPicPr>
+            <p:blipFill>
+              <a:blip r:embed="rId10"/>
+            </p:blipFill>
+            <p:spPr>
+              <a:xfrm>
+                <a:off x="5870575" y="6276975"/>
+                <a:ext cx="1025525" cy="12700"/>
+              </a:xfrm>
+              <a:prstGeom prst="rect"/>
+            </p:spPr>
+          </p:pic>
+        </mc:Fallback>
+      </mc:AlternateContent>
+      <mc:AlternateContent xmlns:mc="http://schemas.openxmlformats.org/markup-compatibility/2006" xmlns:p14="http://schemas.microsoft.com/office/powerpoint/2010/main">
+        <mc:Choice Requires="p14">
+          <p:contentPart r:id="rId11" p14:bwMode="auto">
+            <p14:nvContentPartPr>
+              <p14:cNvPr id="9" name="墨迹 8"/>
+              <p14:cNvContentPartPr/>
+              <p14:nvPr/>
+            </p14:nvContentPartPr>
+            <p14:xfrm>
+              <a:off x="6908800" y="6257925"/>
+              <a:ext cx="638175" cy="6350"/>
+            </p14:xfrm>
+          </p:contentPart>
+        </mc:Choice>
+        <mc:Fallback xmlns="">
+          <p:pic>
+            <p:nvPicPr>
+              <p:cNvPr id="9" name="墨迹 8"/>
+            </p:nvPicPr>
+            <p:blipFill>
+              <a:blip r:embed="rId12"/>
+            </p:blipFill>
+            <p:spPr>
+              <a:xfrm>
+                <a:off x="6908800" y="6257925"/>
+                <a:ext cx="638175" cy="6350"/>
+              </a:xfrm>
+              <a:prstGeom prst="rect"/>
+            </p:spPr>
+          </p:pic>
+        </mc:Fallback>
+      </mc:AlternateContent>
+      <mc:AlternateContent xmlns:mc="http://schemas.openxmlformats.org/markup-compatibility/2006" xmlns:p14="http://schemas.microsoft.com/office/powerpoint/2010/main">
+        <mc:Choice Requires="p14">
+          <p:contentPart r:id="rId13" p14:bwMode="auto">
+            <p14:nvContentPartPr>
+              <p14:cNvPr id="10" name="墨迹 9"/>
+              <p14:cNvContentPartPr/>
+              <p14:nvPr/>
+            </p14:nvContentPartPr>
+            <p14:xfrm>
+              <a:off x="7896225" y="6283325"/>
+              <a:ext cx="803275" cy="22225"/>
+            </p14:xfrm>
+          </p:contentPart>
+        </mc:Choice>
+        <mc:Fallback xmlns="">
+          <p:pic>
+            <p:nvPicPr>
+              <p:cNvPr id="10" name="墨迹 9"/>
+            </p:nvPicPr>
+            <p:blipFill>
+              <a:blip r:embed="rId14"/>
+            </p:blipFill>
+            <p:spPr>
+              <a:xfrm>
+                <a:off x="7896225" y="6283325"/>
+                <a:ext cx="803275" cy="22225"/>
+              </a:xfrm>
+              <a:prstGeom prst="rect"/>
+            </p:spPr>
+          </p:pic>
+        </mc:Fallback>
+      </mc:AlternateContent>
+      <mc:AlternateContent xmlns:mc="http://schemas.openxmlformats.org/markup-compatibility/2006" xmlns:p14="http://schemas.microsoft.com/office/powerpoint/2010/main">
+        <mc:Choice Requires="p14">
+          <p:contentPart r:id="rId15" p14:bwMode="auto">
+            <p14:nvContentPartPr>
+              <p14:cNvPr id="11" name="墨迹 10"/>
+              <p14:cNvContentPartPr/>
+              <p14:nvPr/>
+            </p14:nvContentPartPr>
+            <p14:xfrm>
+              <a:off x="317500" y="3505200"/>
+              <a:ext cx="2546350" cy="155575"/>
+            </p14:xfrm>
+          </p:contentPart>
+        </mc:Choice>
+        <mc:Fallback xmlns="">
+          <p:pic>
+            <p:nvPicPr>
+              <p:cNvPr id="11" name="墨迹 10"/>
+            </p:nvPicPr>
+            <p:blipFill>
+              <a:blip r:embed="rId16"/>
+            </p:blipFill>
+            <p:spPr>
+              <a:xfrm>
+                <a:off x="317500" y="3505200"/>
+                <a:ext cx="2546350" cy="155575"/>
+              </a:xfrm>
+              <a:prstGeom prst="rect"/>
+            </p:spPr>
+          </p:pic>
+        </mc:Fallback>
+      </mc:AlternateContent>
+      <mc:AlternateContent xmlns:mc="http://schemas.openxmlformats.org/markup-compatibility/2006" xmlns:p14="http://schemas.microsoft.com/office/powerpoint/2010/main">
+        <mc:Choice Requires="p14">
+          <p:contentPart r:id="rId17" p14:bwMode="auto">
+            <p14:nvContentPartPr>
+              <p14:cNvPr id="12" name="墨迹 11"/>
+              <p14:cNvContentPartPr/>
+              <p14:nvPr/>
+            </p14:nvContentPartPr>
+            <p14:xfrm>
+              <a:off x="514350" y="3787775"/>
+              <a:ext cx="1692275" cy="63500"/>
+            </p14:xfrm>
+          </p:contentPart>
+        </mc:Choice>
+        <mc:Fallback xmlns="">
+          <p:pic>
+            <p:nvPicPr>
+              <p:cNvPr id="12" name="墨迹 11"/>
+            </p:nvPicPr>
+            <p:blipFill>
+              <a:blip r:embed="rId18"/>
+            </p:blipFill>
+            <p:spPr>
+              <a:xfrm>
+                <a:off x="514350" y="3787775"/>
+                <a:ext cx="1692275" cy="63500"/>
+              </a:xfrm>
+              <a:prstGeom prst="rect"/>
+            </p:spPr>
+          </p:pic>
+        </mc:Fallback>
+      </mc:AlternateContent>
+      <mc:AlternateContent xmlns:mc="http://schemas.openxmlformats.org/markup-compatibility/2006" xmlns:p14="http://schemas.microsoft.com/office/powerpoint/2010/main">
+        <mc:Choice Requires="p14">
+          <p:contentPart r:id="rId19" p14:bwMode="auto">
+            <p14:nvContentPartPr>
+              <p14:cNvPr id="13" name="墨迹 12"/>
+              <p14:cNvContentPartPr/>
+              <p14:nvPr/>
+            </p14:nvContentPartPr>
+            <p14:xfrm>
+              <a:off x="2419350" y="3502025"/>
+              <a:ext cx="187325" cy="374650"/>
+            </p14:xfrm>
+          </p:contentPart>
+        </mc:Choice>
+        <mc:Fallback xmlns="">
+          <p:pic>
+            <p:nvPicPr>
+              <p:cNvPr id="13" name="墨迹 12"/>
+            </p:nvPicPr>
+            <p:blipFill>
+              <a:blip r:embed="rId20"/>
+            </p:blipFill>
+            <p:spPr>
+              <a:xfrm>
+                <a:off x="2419350" y="3502025"/>
+                <a:ext cx="187325" cy="374650"/>
+              </a:xfrm>
+              <a:prstGeom prst="rect"/>
+            </p:spPr>
+          </p:pic>
+        </mc:Fallback>
+      </mc:AlternateContent>
+      <mc:AlternateContent xmlns:mc="http://schemas.openxmlformats.org/markup-compatibility/2006" xmlns:p14="http://schemas.microsoft.com/office/powerpoint/2010/main">
+        <mc:Choice Requires="p14">
+          <p:contentPart r:id="rId21" p14:bwMode="auto">
+            <p14:nvContentPartPr>
+              <p14:cNvPr id="14" name="墨迹 13"/>
+              <p14:cNvContentPartPr/>
+              <p14:nvPr/>
+            </p14:nvContentPartPr>
+            <p14:xfrm>
+              <a:off x="2660650" y="3787775"/>
+              <a:ext cx="111125" cy="88900"/>
+            </p14:xfrm>
+          </p:contentPart>
+        </mc:Choice>
+        <mc:Fallback xmlns="">
+          <p:pic>
+            <p:nvPicPr>
+              <p:cNvPr id="14" name="墨迹 13"/>
+            </p:nvPicPr>
+            <p:blipFill>
+              <a:blip r:embed="rId22"/>
+            </p:blipFill>
+            <p:spPr>
+              <a:xfrm>
+                <a:off x="2660650" y="3787775"/>
+                <a:ext cx="111125" cy="88900"/>
+              </a:xfrm>
+              <a:prstGeom prst="rect"/>
+            </p:spPr>
+          </p:pic>
+        </mc:Fallback>
+      </mc:AlternateContent>
+      <mc:AlternateContent xmlns:mc="http://schemas.openxmlformats.org/markup-compatibility/2006" xmlns:p14="http://schemas.microsoft.com/office/powerpoint/2010/main">
+        <mc:Choice Requires="p14">
+          <p:contentPart r:id="rId23" p14:bwMode="auto">
+            <p14:nvContentPartPr>
+              <p14:cNvPr id="15" name="墨迹 14"/>
+              <p14:cNvContentPartPr/>
+              <p14:nvPr/>
+            </p14:nvContentPartPr>
+            <p14:xfrm>
+              <a:off x="2844800" y="3816350"/>
+              <a:ext cx="360" cy="31750"/>
+            </p14:xfrm>
+          </p:contentPart>
+        </mc:Choice>
+        <mc:Fallback xmlns="">
+          <p:pic>
+            <p:nvPicPr>
+              <p:cNvPr id="15" name="墨迹 14"/>
+            </p:nvPicPr>
+            <p:blipFill>
+              <a:blip r:embed="rId24"/>
+            </p:blipFill>
+            <p:spPr>
+              <a:xfrm>
+                <a:off x="2844800" y="3816350"/>
+                <a:ext cx="360" cy="31750"/>
+              </a:xfrm>
+              <a:prstGeom prst="rect"/>
+            </p:spPr>
+          </p:pic>
+        </mc:Fallback>
+      </mc:AlternateContent>
+      <mc:AlternateContent xmlns:mc="http://schemas.openxmlformats.org/markup-compatibility/2006" xmlns:p14="http://schemas.microsoft.com/office/powerpoint/2010/main">
+        <mc:Choice Requires="p14">
+          <p:contentPart r:id="rId25" p14:bwMode="auto">
+            <p14:nvContentPartPr>
+              <p14:cNvPr id="16" name="墨迹 15"/>
+              <p14:cNvContentPartPr/>
+              <p14:nvPr/>
+            </p14:nvContentPartPr>
+            <p14:xfrm>
+              <a:off x="2851150" y="3743325"/>
+              <a:ext cx="6350" cy="360"/>
+            </p14:xfrm>
+          </p:contentPart>
+        </mc:Choice>
+        <mc:Fallback xmlns="">
+          <p:pic>
+            <p:nvPicPr>
+              <p:cNvPr id="16" name="墨迹 15"/>
+            </p:nvPicPr>
+            <p:blipFill>
+              <a:blip r:embed="rId26"/>
+            </p:blipFill>
+            <p:spPr>
+              <a:xfrm>
+                <a:off x="2851150" y="3743325"/>
+                <a:ext cx="6350" cy="360"/>
+              </a:xfrm>
+              <a:prstGeom prst="rect"/>
+            </p:spPr>
+          </p:pic>
+        </mc:Fallback>
+      </mc:AlternateContent>
+      <mc:AlternateContent xmlns:mc="http://schemas.openxmlformats.org/markup-compatibility/2006" xmlns:p14="http://schemas.microsoft.com/office/powerpoint/2010/main">
+        <mc:Choice Requires="p14">
+          <p:contentPart r:id="rId27" p14:bwMode="auto">
+            <p14:nvContentPartPr>
+              <p14:cNvPr id="17" name="墨迹 16"/>
+              <p14:cNvContentPartPr/>
+              <p14:nvPr/>
+            </p14:nvContentPartPr>
+            <p14:xfrm>
+              <a:off x="2952750" y="3638550"/>
+              <a:ext cx="196850" cy="247650"/>
+            </p14:xfrm>
+          </p:contentPart>
+        </mc:Choice>
+        <mc:Fallback xmlns="">
+          <p:pic>
+            <p:nvPicPr>
+              <p:cNvPr id="17" name="墨迹 16"/>
+            </p:nvPicPr>
+            <p:blipFill>
+              <a:blip r:embed="rId28"/>
+            </p:blipFill>
+            <p:spPr>
+              <a:xfrm>
+                <a:off x="2952750" y="3638550"/>
+                <a:ext cx="196850" cy="247650"/>
+              </a:xfrm>
+              <a:prstGeom prst="rect"/>
+            </p:spPr>
+          </p:pic>
+        </mc:Fallback>
+      </mc:AlternateContent>
+      <mc:AlternateContent xmlns:mc="http://schemas.openxmlformats.org/markup-compatibility/2006" xmlns:p14="http://schemas.microsoft.com/office/powerpoint/2010/main">
+        <mc:Choice Requires="p14">
+          <p:contentPart r:id="rId29" p14:bwMode="auto">
+            <p14:nvContentPartPr>
+              <p14:cNvPr id="18" name="墨迹 17"/>
+              <p14:cNvContentPartPr/>
+              <p14:nvPr/>
+            </p14:nvContentPartPr>
+            <p14:xfrm>
+              <a:off x="3038475" y="3727450"/>
+              <a:ext cx="82550" cy="76200"/>
+            </p14:xfrm>
+          </p:contentPart>
+        </mc:Choice>
+        <mc:Fallback xmlns="">
+          <p:pic>
+            <p:nvPicPr>
+              <p:cNvPr id="18" name="墨迹 17"/>
+            </p:nvPicPr>
+            <p:blipFill>
+              <a:blip r:embed="rId30"/>
+            </p:blipFill>
+            <p:spPr>
+              <a:xfrm>
+                <a:off x="3038475" y="3727450"/>
+                <a:ext cx="82550" cy="76200"/>
+              </a:xfrm>
+              <a:prstGeom prst="rect"/>
+            </p:spPr>
+          </p:pic>
+        </mc:Fallback>
+      </mc:AlternateContent>
+      <mc:AlternateContent xmlns:mc="http://schemas.openxmlformats.org/markup-compatibility/2006" xmlns:p14="http://schemas.microsoft.com/office/powerpoint/2010/main">
+        <mc:Choice Requires="p14">
+          <p:contentPart r:id="rId31" p14:bwMode="auto">
+            <p14:nvContentPartPr>
+              <p14:cNvPr id="19" name="墨迹 18"/>
+              <p14:cNvContentPartPr/>
+              <p14:nvPr/>
+            </p14:nvContentPartPr>
+            <p14:xfrm>
+              <a:off x="3197225" y="3625850"/>
+              <a:ext cx="225425" cy="196850"/>
+            </p14:xfrm>
+          </p:contentPart>
+        </mc:Choice>
+        <mc:Fallback xmlns="">
+          <p:pic>
+            <p:nvPicPr>
+              <p:cNvPr id="19" name="墨迹 18"/>
+            </p:nvPicPr>
+            <p:blipFill>
+              <a:blip r:embed="rId32"/>
+            </p:blipFill>
+            <p:spPr>
+              <a:xfrm>
+                <a:off x="3197225" y="3625850"/>
+                <a:ext cx="225425" cy="196850"/>
+              </a:xfrm>
+              <a:prstGeom prst="rect"/>
+            </p:spPr>
+          </p:pic>
+        </mc:Fallback>
+      </mc:AlternateContent>
+      <mc:AlternateContent xmlns:mc="http://schemas.openxmlformats.org/markup-compatibility/2006" xmlns:p14="http://schemas.microsoft.com/office/powerpoint/2010/main">
+        <mc:Choice Requires="p14">
+          <p:contentPart r:id="rId33" p14:bwMode="auto">
+            <p14:nvContentPartPr>
+              <p14:cNvPr id="20" name="墨迹 19"/>
+              <p14:cNvContentPartPr/>
+              <p14:nvPr/>
+            </p14:nvContentPartPr>
+            <p14:xfrm>
+              <a:off x="460375" y="4641850"/>
+              <a:ext cx="4803775" cy="180975"/>
+            </p14:xfrm>
+          </p:contentPart>
+        </mc:Choice>
+        <mc:Fallback xmlns="">
+          <p:pic>
+            <p:nvPicPr>
+              <p:cNvPr id="20" name="墨迹 19"/>
+            </p:nvPicPr>
+            <p:blipFill>
+              <a:blip r:embed="rId34"/>
+            </p:blipFill>
+            <p:spPr>
+              <a:xfrm>
+                <a:off x="460375" y="4641850"/>
+                <a:ext cx="4803775" cy="180975"/>
+              </a:xfrm>
+              <a:prstGeom prst="rect"/>
+            </p:spPr>
+          </p:pic>
+        </mc:Fallback>
+      </mc:AlternateContent>
     </p:spTree>
   </p:cSld>
   <p:clrMapOvr>
